--- a/data/deep_dives/carteira_fgts_peers_8987af47/exports/documentary_comparison.pptx
+++ b/data/deep_dives/carteira_fgts_peers_8987af47/exports/documentary_comparison.pptx
@@ -7321,7 +7321,7 @@
                       <a:r>
                         <a:rPr sz="1300" b="1">
                           <a:solidFill>
-                            <a:srgbClr val="1F1F1F"/>
+                            <a:srgbClr val="FFFFFF"/>
                           </a:solidFill>
                           <a:latin typeface="Calibri"/>
                         </a:rPr>
@@ -7331,7 +7331,7 @@
                   </a:txBody>
                   <a:tcPr marL="91440" marR="91440" marT="41148" marB="41148" anchor="ctr">
                     <a:solidFill>
-                      <a:srgbClr val="EC7000"/>
+                      <a:srgbClr val="FF6200"/>
                     </a:solidFill>
                     <a:lnL>
                       <a:noFill/>
@@ -7370,7 +7370,7 @@
                       <a:r>
                         <a:rPr sz="1300" b="1">
                           <a:solidFill>
-                            <a:srgbClr val="1F1F1F"/>
+                            <a:srgbClr val="FFFFFF"/>
                           </a:solidFill>
                           <a:latin typeface="Calibri"/>
                         </a:rPr>
@@ -7380,7 +7380,7 @@
                   </a:txBody>
                   <a:tcPr marL="91440" marR="91440" marT="41148" marB="41148" anchor="ctr">
                     <a:solidFill>
-                      <a:srgbClr val="EC7000"/>
+                      <a:srgbClr val="FF6200"/>
                     </a:solidFill>
                     <a:lnL>
                       <a:noFill/>
@@ -7419,7 +7419,7 @@
                       <a:r>
                         <a:rPr sz="1300" b="1">
                           <a:solidFill>
-                            <a:srgbClr val="1F1F1F"/>
+                            <a:srgbClr val="FFFFFF"/>
                           </a:solidFill>
                           <a:latin typeface="Calibri"/>
                         </a:rPr>
@@ -7429,7 +7429,7 @@
                   </a:txBody>
                   <a:tcPr marL="91440" marR="91440" marT="41148" marB="41148" anchor="ctr">
                     <a:solidFill>
-                      <a:srgbClr val="EC7000"/>
+                      <a:srgbClr val="FF6200"/>
                     </a:solidFill>
                     <a:lnL>
                       <a:noFill/>
@@ -7468,7 +7468,7 @@
                       <a:r>
                         <a:rPr sz="1300" b="1">
                           <a:solidFill>
-                            <a:srgbClr val="1F1F1F"/>
+                            <a:srgbClr val="FFFFFF"/>
                           </a:solidFill>
                           <a:latin typeface="Calibri"/>
                         </a:rPr>
@@ -7478,7 +7478,7 @@
                   </a:txBody>
                   <a:tcPr marL="91440" marR="91440" marT="41148" marB="41148" anchor="ctr">
                     <a:solidFill>
-                      <a:srgbClr val="EC7000"/>
+                      <a:srgbClr val="FF6200"/>
                     </a:solidFill>
                     <a:lnL>
                       <a:noFill/>
@@ -7517,7 +7517,7 @@
                       <a:r>
                         <a:rPr sz="1300" b="1">
                           <a:solidFill>
-                            <a:srgbClr val="1F1F1F"/>
+                            <a:srgbClr val="FFFFFF"/>
                           </a:solidFill>
                           <a:latin typeface="Calibri"/>
                         </a:rPr>
@@ -7527,7 +7527,7 @@
                   </a:txBody>
                   <a:tcPr marL="91440" marR="91440" marT="41148" marB="41148" anchor="ctr">
                     <a:solidFill>
-                      <a:srgbClr val="EC7000"/>
+                      <a:srgbClr val="FF6200"/>
                     </a:solidFill>
                     <a:lnL>
                       <a:noFill/>
@@ -7688,29 +7688,7 @@
                           </a:solidFill>
                           <a:latin typeface="Calibri"/>
                         </a:rPr>
-                        <a:t>Não localizado no</a:t>
-                      </a:r>
-                    </a:p>
-                    <a:p>
-                      <a:pPr algn="ctr">
-                        <a:lnSpc>
-                          <a:spcPct val="100000"/>
-                        </a:lnSpc>
-                        <a:spcBef>
-                          <a:spcPts val="0"/>
-                        </a:spcBef>
-                        <a:spcAft>
-                          <a:spcPts val="0"/>
-                        </a:spcAft>
-                      </a:pPr>
-                      <a:r>
-                        <a:rPr sz="1300" b="0">
-                          <a:solidFill>
-                            <a:srgbClr val="1F1F1F"/>
-                          </a:solidFill>
-                          <a:latin typeface="Calibri"/>
-                        </a:rPr>
-                        <a:t>corpus acessível</a:t>
+                        <a:t>-</a:t>
                       </a:r>
                     </a:p>
                   </a:txBody>
@@ -8057,29 +8035,7 @@
                           </a:solidFill>
                           <a:latin typeface="Calibri"/>
                         </a:rPr>
-                        <a:t>Não localizado no</a:t>
-                      </a:r>
-                    </a:p>
-                    <a:p>
-                      <a:pPr algn="ctr">
-                        <a:lnSpc>
-                          <a:spcPct val="100000"/>
-                        </a:lnSpc>
-                        <a:spcBef>
-                          <a:spcPts val="0"/>
-                        </a:spcBef>
-                        <a:spcAft>
-                          <a:spcPts val="0"/>
-                        </a:spcAft>
-                      </a:pPr>
-                      <a:r>
-                        <a:rPr sz="1300" b="0">
-                          <a:solidFill>
-                            <a:srgbClr val="1F1F1F"/>
-                          </a:solidFill>
-                          <a:latin typeface="Calibri"/>
-                        </a:rPr>
-                        <a:t>corpus acessível</a:t>
+                        <a:t>-</a:t>
                       </a:r>
                     </a:p>
                   </a:txBody>
@@ -8126,29 +8082,7 @@
                           </a:solidFill>
                           <a:latin typeface="Calibri"/>
                         </a:rPr>
-                        <a:t>Não localizado no</a:t>
-                      </a:r>
-                    </a:p>
-                    <a:p>
-                      <a:pPr algn="ctr">
-                        <a:lnSpc>
-                          <a:spcPct val="100000"/>
-                        </a:lnSpc>
-                        <a:spcBef>
-                          <a:spcPts val="0"/>
-                        </a:spcBef>
-                        <a:spcAft>
-                          <a:spcPts val="0"/>
-                        </a:spcAft>
-                      </a:pPr>
-                      <a:r>
-                        <a:rPr sz="1300" b="0">
-                          <a:solidFill>
-                            <a:srgbClr val="1F1F1F"/>
-                          </a:solidFill>
-                          <a:latin typeface="Calibri"/>
-                        </a:rPr>
-                        <a:t>corpus acessível</a:t>
+                        <a:t>-</a:t>
                       </a:r>
                     </a:p>
                   </a:txBody>
@@ -8426,29 +8360,7 @@
                           </a:solidFill>
                           <a:latin typeface="Calibri"/>
                         </a:rPr>
-                        <a:t>Não localizado no</a:t>
-                      </a:r>
-                    </a:p>
-                    <a:p>
-                      <a:pPr algn="ctr">
-                        <a:lnSpc>
-                          <a:spcPct val="100000"/>
-                        </a:lnSpc>
-                        <a:spcBef>
-                          <a:spcPts val="0"/>
-                        </a:spcBef>
-                        <a:spcAft>
-                          <a:spcPts val="0"/>
-                        </a:spcAft>
-                      </a:pPr>
-                      <a:r>
-                        <a:rPr sz="1300" b="0">
-                          <a:solidFill>
-                            <a:srgbClr val="1F1F1F"/>
-                          </a:solidFill>
-                          <a:latin typeface="Calibri"/>
-                        </a:rPr>
-                        <a:t>corpus acessível</a:t>
+                        <a:t>-</a:t>
                       </a:r>
                     </a:p>
                   </a:txBody>
@@ -8795,29 +8707,7 @@
                           </a:solidFill>
                           <a:latin typeface="Calibri"/>
                         </a:rPr>
-                        <a:t>Não localizado no</a:t>
-                      </a:r>
-                    </a:p>
-                    <a:p>
-                      <a:pPr algn="ctr">
-                        <a:lnSpc>
-                          <a:spcPct val="100000"/>
-                        </a:lnSpc>
-                        <a:spcBef>
-                          <a:spcPts val="0"/>
-                        </a:spcBef>
-                        <a:spcAft>
-                          <a:spcPts val="0"/>
-                        </a:spcAft>
-                      </a:pPr>
-                      <a:r>
-                        <a:rPr sz="1300" b="0">
-                          <a:solidFill>
-                            <a:srgbClr val="1F1F1F"/>
-                          </a:solidFill>
-                          <a:latin typeface="Calibri"/>
-                        </a:rPr>
-                        <a:t>corpus acessível</a:t>
+                        <a:t>-</a:t>
                       </a:r>
                     </a:p>
                   </a:txBody>
@@ -9208,29 +9098,7 @@
                           </a:solidFill>
                           <a:latin typeface="Calibri"/>
                         </a:rPr>
-                        <a:t>Não localizado no</a:t>
-                      </a:r>
-                    </a:p>
-                    <a:p>
-                      <a:pPr algn="ctr">
-                        <a:lnSpc>
-                          <a:spcPct val="100000"/>
-                        </a:lnSpc>
-                        <a:spcBef>
-                          <a:spcPts val="0"/>
-                        </a:spcBef>
-                        <a:spcAft>
-                          <a:spcPts val="0"/>
-                        </a:spcAft>
-                      </a:pPr>
-                      <a:r>
-                        <a:rPr sz="1300" b="0">
-                          <a:solidFill>
-                            <a:srgbClr val="1F1F1F"/>
-                          </a:solidFill>
-                          <a:latin typeface="Calibri"/>
-                        </a:rPr>
-                        <a:t>corpus acessível</a:t>
+                        <a:t>-</a:t>
                       </a:r>
                     </a:p>
                   </a:txBody>
@@ -9625,29 +9493,7 @@
                           </a:solidFill>
                           <a:latin typeface="Calibri"/>
                         </a:rPr>
-                        <a:t>Não localizado no</a:t>
-                      </a:r>
-                    </a:p>
-                    <a:p>
-                      <a:pPr algn="ctr">
-                        <a:lnSpc>
-                          <a:spcPct val="100000"/>
-                        </a:lnSpc>
-                        <a:spcBef>
-                          <a:spcPts val="0"/>
-                        </a:spcBef>
-                        <a:spcAft>
-                          <a:spcPts val="0"/>
-                        </a:spcAft>
-                      </a:pPr>
-                      <a:r>
-                        <a:rPr sz="1300" b="0">
-                          <a:solidFill>
-                            <a:srgbClr val="1F1F1F"/>
-                          </a:solidFill>
-                          <a:latin typeface="Calibri"/>
-                        </a:rPr>
-                        <a:t>corpus acessível</a:t>
+                        <a:t>-</a:t>
                       </a:r>
                     </a:p>
                   </a:txBody>
@@ -9959,7 +9805,7 @@
         </p:nvGraphicFramePr>
         <p:xfrm>
           <a:off x="438912" y="932688"/>
-          <a:ext cx="11313870" cy="1993392"/>
+          <a:ext cx="11313870" cy="1618488"/>
         </p:xfrm>
         <a:graphic>
           <a:graphicData uri="http://schemas.openxmlformats.org/drawingml/2006/table">
@@ -9995,7 +9841,7 @@
                       <a:r>
                         <a:rPr sz="1300" b="1">
                           <a:solidFill>
-                            <a:srgbClr val="1F1F1F"/>
+                            <a:srgbClr val="FFFFFF"/>
                           </a:solidFill>
                           <a:latin typeface="Calibri"/>
                         </a:rPr>
@@ -10005,7 +9851,7 @@
                   </a:txBody>
                   <a:tcPr marL="91440" marR="91440" marT="41148" marB="41148" anchor="ctr">
                     <a:solidFill>
-                      <a:srgbClr val="EC7000"/>
+                      <a:srgbClr val="FF6200"/>
                     </a:solidFill>
                     <a:lnL>
                       <a:noFill/>
@@ -10044,7 +9890,7 @@
                       <a:r>
                         <a:rPr sz="1300" b="1">
                           <a:solidFill>
-                            <a:srgbClr val="1F1F1F"/>
+                            <a:srgbClr val="FFFFFF"/>
                           </a:solidFill>
                           <a:latin typeface="Calibri"/>
                         </a:rPr>
@@ -10054,7 +9900,7 @@
                   </a:txBody>
                   <a:tcPr marL="91440" marR="91440" marT="41148" marB="41148" anchor="ctr">
                     <a:solidFill>
-                      <a:srgbClr val="EC7000"/>
+                      <a:srgbClr val="FF6200"/>
                     </a:solidFill>
                     <a:lnL>
                       <a:noFill/>
@@ -10093,7 +9939,7 @@
                       <a:r>
                         <a:rPr sz="1300" b="1">
                           <a:solidFill>
-                            <a:srgbClr val="1F1F1F"/>
+                            <a:srgbClr val="FFFFFF"/>
                           </a:solidFill>
                           <a:latin typeface="Calibri"/>
                         </a:rPr>
@@ -10103,7 +9949,7 @@
                   </a:txBody>
                   <a:tcPr marL="91440" marR="91440" marT="41148" marB="41148" anchor="ctr">
                     <a:solidFill>
-                      <a:srgbClr val="EC7000"/>
+                      <a:srgbClr val="FF6200"/>
                     </a:solidFill>
                     <a:lnL>
                       <a:noFill/>
@@ -10142,7 +9988,7 @@
                       <a:r>
                         <a:rPr sz="1300" b="1">
                           <a:solidFill>
-                            <a:srgbClr val="1F1F1F"/>
+                            <a:srgbClr val="FFFFFF"/>
                           </a:solidFill>
                           <a:latin typeface="Calibri"/>
                         </a:rPr>
@@ -10152,7 +9998,7 @@
                   </a:txBody>
                   <a:tcPr marL="91440" marR="91440" marT="41148" marB="41148" anchor="ctr">
                     <a:solidFill>
-                      <a:srgbClr val="EC7000"/>
+                      <a:srgbClr val="FF6200"/>
                     </a:solidFill>
                     <a:lnL>
                       <a:noFill/>
@@ -10171,7 +10017,7 @@
                   </a:tcPr>
                 </a:tc>
               </a:tr>
-              <a:tr h="470916">
+              <a:tr h="283464">
                 <a:tc>
                   <a:txBody>
                     <a:bodyPr wrap="square">
@@ -10244,29 +10090,7 @@
                           </a:solidFill>
                           <a:latin typeface="Calibri"/>
                         </a:rPr>
-                        <a:t>Não localizado no corpus</a:t>
-                      </a:r>
-                    </a:p>
-                    <a:p>
-                      <a:pPr algn="ctr">
-                        <a:lnSpc>
-                          <a:spcPct val="100000"/>
-                        </a:lnSpc>
-                        <a:spcBef>
-                          <a:spcPts val="0"/>
-                        </a:spcBef>
-                        <a:spcAft>
-                          <a:spcPts val="0"/>
-                        </a:spcAft>
-                      </a:pPr>
-                      <a:r>
-                        <a:rPr sz="1300" b="0">
-                          <a:solidFill>
-                            <a:srgbClr val="1F1F1F"/>
-                          </a:solidFill>
-                          <a:latin typeface="Calibri"/>
-                        </a:rPr>
-                        <a:t>acessível</a:t>
+                        <a:t>-</a:t>
                       </a:r>
                     </a:p>
                   </a:txBody>
@@ -10313,29 +10137,7 @@
                           </a:solidFill>
                           <a:latin typeface="Calibri"/>
                         </a:rPr>
-                        <a:t>Não localizado no corpus</a:t>
-                      </a:r>
-                    </a:p>
-                    <a:p>
-                      <a:pPr algn="ctr">
-                        <a:lnSpc>
-                          <a:spcPct val="100000"/>
-                        </a:lnSpc>
-                        <a:spcBef>
-                          <a:spcPts val="0"/>
-                        </a:spcBef>
-                        <a:spcAft>
-                          <a:spcPts val="0"/>
-                        </a:spcAft>
-                      </a:pPr>
-                      <a:r>
-                        <a:rPr sz="1300" b="0">
-                          <a:solidFill>
-                            <a:srgbClr val="1F1F1F"/>
-                          </a:solidFill>
-                          <a:latin typeface="Calibri"/>
-                        </a:rPr>
-                        <a:t>acessível</a:t>
+                        <a:t>-</a:t>
                       </a:r>
                     </a:p>
                   </a:txBody>
@@ -10382,29 +10184,7 @@
                           </a:solidFill>
                           <a:latin typeface="Calibri"/>
                         </a:rPr>
-                        <a:t>Não localizado no corpus</a:t>
-                      </a:r>
-                    </a:p>
-                    <a:p>
-                      <a:pPr algn="ctr">
-                        <a:lnSpc>
-                          <a:spcPct val="100000"/>
-                        </a:lnSpc>
-                        <a:spcBef>
-                          <a:spcPts val="0"/>
-                        </a:spcBef>
-                        <a:spcAft>
-                          <a:spcPts val="0"/>
-                        </a:spcAft>
-                      </a:pPr>
-                      <a:r>
-                        <a:rPr sz="1300" b="0">
-                          <a:solidFill>
-                            <a:srgbClr val="1F1F1F"/>
-                          </a:solidFill>
-                          <a:latin typeface="Calibri"/>
-                        </a:rPr>
-                        <a:t>acessível</a:t>
+                        <a:t>-</a:t>
                       </a:r>
                     </a:p>
                   </a:txBody>
@@ -10500,29 +10280,7 @@
                           </a:solidFill>
                           <a:latin typeface="Calibri"/>
                         </a:rPr>
-                        <a:t>Não localizado no corpus</a:t>
-                      </a:r>
-                    </a:p>
-                    <a:p>
-                      <a:pPr algn="ctr">
-                        <a:lnSpc>
-                          <a:spcPct val="100000"/>
-                        </a:lnSpc>
-                        <a:spcBef>
-                          <a:spcPts val="0"/>
-                        </a:spcBef>
-                        <a:spcAft>
-                          <a:spcPts val="0"/>
-                        </a:spcAft>
-                      </a:pPr>
-                      <a:r>
-                        <a:rPr sz="1300" b="0">
-                          <a:solidFill>
-                            <a:srgbClr val="1F1F1F"/>
-                          </a:solidFill>
-                          <a:latin typeface="Calibri"/>
-                        </a:rPr>
-                        <a:t>acessível</a:t>
+                        <a:t>-</a:t>
                       </a:r>
                     </a:p>
                   </a:txBody>
@@ -10660,29 +10418,7 @@
                           </a:solidFill>
                           <a:latin typeface="Calibri"/>
                         </a:rPr>
-                        <a:t>Não localizado no corpus</a:t>
-                      </a:r>
-                    </a:p>
-                    <a:p>
-                      <a:pPr algn="ctr">
-                        <a:lnSpc>
-                          <a:spcPct val="100000"/>
-                        </a:lnSpc>
-                        <a:spcBef>
-                          <a:spcPts val="0"/>
-                        </a:spcBef>
-                        <a:spcAft>
-                          <a:spcPts val="0"/>
-                        </a:spcAft>
-                      </a:pPr>
-                      <a:r>
-                        <a:rPr sz="1300" b="0">
-                          <a:solidFill>
-                            <a:srgbClr val="1F1F1F"/>
-                          </a:solidFill>
-                          <a:latin typeface="Calibri"/>
-                        </a:rPr>
-                        <a:t>acessível</a:t>
+                        <a:t>-</a:t>
                       </a:r>
                     </a:p>
                   </a:txBody>
@@ -10705,7 +10441,7 @@
                   </a:tcPr>
                 </a:tc>
               </a:tr>
-              <a:tr h="470916">
+              <a:tr h="283464">
                 <a:tc>
                   <a:txBody>
                     <a:bodyPr wrap="square">
@@ -10780,29 +10516,7 @@
                           </a:solidFill>
                           <a:latin typeface="Calibri"/>
                         </a:rPr>
-                        <a:t>Não localizado no corpus</a:t>
-                      </a:r>
-                    </a:p>
-                    <a:p>
-                      <a:pPr algn="ctr">
-                        <a:lnSpc>
-                          <a:spcPct val="100000"/>
-                        </a:lnSpc>
-                        <a:spcBef>
-                          <a:spcPts val="0"/>
-                        </a:spcBef>
-                        <a:spcAft>
-                          <a:spcPts val="0"/>
-                        </a:spcAft>
-                      </a:pPr>
-                      <a:r>
-                        <a:rPr sz="1300" b="0">
-                          <a:solidFill>
-                            <a:srgbClr val="1F1F1F"/>
-                          </a:solidFill>
-                          <a:latin typeface="Calibri"/>
-                        </a:rPr>
-                        <a:t>acessível</a:t>
+                        <a:t>-</a:t>
                       </a:r>
                     </a:p>
                   </a:txBody>
@@ -10851,29 +10565,7 @@
                           </a:solidFill>
                           <a:latin typeface="Calibri"/>
                         </a:rPr>
-                        <a:t>Não localizado no corpus</a:t>
-                      </a:r>
-                    </a:p>
-                    <a:p>
-                      <a:pPr algn="ctr">
-                        <a:lnSpc>
-                          <a:spcPct val="100000"/>
-                        </a:lnSpc>
-                        <a:spcBef>
-                          <a:spcPts val="0"/>
-                        </a:spcBef>
-                        <a:spcAft>
-                          <a:spcPts val="0"/>
-                        </a:spcAft>
-                      </a:pPr>
-                      <a:r>
-                        <a:rPr sz="1300" b="0">
-                          <a:solidFill>
-                            <a:srgbClr val="1F1F1F"/>
-                          </a:solidFill>
-                          <a:latin typeface="Calibri"/>
-                        </a:rPr>
-                        <a:t>acessível</a:t>
+                        <a:t>-</a:t>
                       </a:r>
                     </a:p>
                   </a:txBody>
@@ -10922,29 +10614,7 @@
                           </a:solidFill>
                           <a:latin typeface="Calibri"/>
                         </a:rPr>
-                        <a:t>Não localizado no corpus</a:t>
-                      </a:r>
-                    </a:p>
-                    <a:p>
-                      <a:pPr algn="ctr">
-                        <a:lnSpc>
-                          <a:spcPct val="100000"/>
-                        </a:lnSpc>
-                        <a:spcBef>
-                          <a:spcPts val="0"/>
-                        </a:spcBef>
-                        <a:spcAft>
-                          <a:spcPts val="0"/>
-                        </a:spcAft>
-                      </a:pPr>
-                      <a:r>
-                        <a:rPr sz="1300" b="0">
-                          <a:solidFill>
-                            <a:srgbClr val="1F1F1F"/>
-                          </a:solidFill>
-                          <a:latin typeface="Calibri"/>
-                        </a:rPr>
-                        <a:t>acessível</a:t>
+                        <a:t>-</a:t>
                       </a:r>
                     </a:p>
                   </a:txBody>
@@ -11151,7 +10821,7 @@
                       <a:r>
                         <a:rPr sz="1300" b="1">
                           <a:solidFill>
-                            <a:srgbClr val="1F1F1F"/>
+                            <a:srgbClr val="FFFFFF"/>
                           </a:solidFill>
                           <a:latin typeface="Calibri"/>
                         </a:rPr>
@@ -11161,7 +10831,7 @@
                   </a:txBody>
                   <a:tcPr marL="91440" marR="91440" marT="41148" marB="41148" anchor="ctr">
                     <a:solidFill>
-                      <a:srgbClr val="EC7000"/>
+                      <a:srgbClr val="FF6200"/>
                     </a:solidFill>
                     <a:lnL>
                       <a:noFill/>
@@ -11200,7 +10870,7 @@
                       <a:r>
                         <a:rPr sz="1300" b="1">
                           <a:solidFill>
-                            <a:srgbClr val="1F1F1F"/>
+                            <a:srgbClr val="FFFFFF"/>
                           </a:solidFill>
                           <a:latin typeface="Calibri"/>
                         </a:rPr>
@@ -11210,7 +10880,7 @@
                   </a:txBody>
                   <a:tcPr marL="91440" marR="91440" marT="41148" marB="41148" anchor="ctr">
                     <a:solidFill>
-                      <a:srgbClr val="EC7000"/>
+                      <a:srgbClr val="FF6200"/>
                     </a:solidFill>
                     <a:lnL>
                       <a:noFill/>
@@ -11249,7 +10919,7 @@
                       <a:r>
                         <a:rPr sz="1300" b="1">
                           <a:solidFill>
-                            <a:srgbClr val="1F1F1F"/>
+                            <a:srgbClr val="FFFFFF"/>
                           </a:solidFill>
                           <a:latin typeface="Calibri"/>
                         </a:rPr>
@@ -11259,7 +10929,7 @@
                   </a:txBody>
                   <a:tcPr marL="91440" marR="91440" marT="41148" marB="41148" anchor="ctr">
                     <a:solidFill>
-                      <a:srgbClr val="EC7000"/>
+                      <a:srgbClr val="FF6200"/>
                     </a:solidFill>
                     <a:lnL>
                       <a:noFill/>
@@ -11298,7 +10968,7 @@
                       <a:r>
                         <a:rPr sz="1300" b="1">
                           <a:solidFill>
-                            <a:srgbClr val="1F1F1F"/>
+                            <a:srgbClr val="FFFFFF"/>
                           </a:solidFill>
                           <a:latin typeface="Calibri"/>
                         </a:rPr>
@@ -11308,7 +10978,7 @@
                   </a:txBody>
                   <a:tcPr marL="91440" marR="91440" marT="41148" marB="41148" anchor="ctr">
                     <a:solidFill>
-                      <a:srgbClr val="EC7000"/>
+                      <a:srgbClr val="FF6200"/>
                     </a:solidFill>
                     <a:lnL>
                       <a:noFill/>
@@ -11347,7 +11017,7 @@
                       <a:r>
                         <a:rPr sz="1300" b="1">
                           <a:solidFill>
-                            <a:srgbClr val="1F1F1F"/>
+                            <a:srgbClr val="FFFFFF"/>
                           </a:solidFill>
                           <a:latin typeface="Calibri"/>
                         </a:rPr>
@@ -11357,7 +11027,7 @@
                   </a:txBody>
                   <a:tcPr marL="91440" marR="91440" marT="41148" marB="41148" anchor="ctr">
                     <a:solidFill>
-                      <a:srgbClr val="EC7000"/>
+                      <a:srgbClr val="FF6200"/>
                     </a:solidFill>
                     <a:lnL>
                       <a:noFill/>
@@ -11540,29 +11210,7 @@
                           </a:solidFill>
                           <a:latin typeface="Calibri"/>
                         </a:rPr>
-                        <a:t>Não localizado no</a:t>
-                      </a:r>
-                    </a:p>
-                    <a:p>
-                      <a:pPr algn="ctr">
-                        <a:lnSpc>
-                          <a:spcPct val="100000"/>
-                        </a:lnSpc>
-                        <a:spcBef>
-                          <a:spcPts val="0"/>
-                        </a:spcBef>
-                        <a:spcAft>
-                          <a:spcPts val="0"/>
-                        </a:spcAft>
-                      </a:pPr>
-                      <a:r>
-                        <a:rPr sz="1300" b="0">
-                          <a:solidFill>
-                            <a:srgbClr val="1F1F1F"/>
-                          </a:solidFill>
-                          <a:latin typeface="Calibri"/>
-                        </a:rPr>
-                        <a:t>corpus acessível</a:t>
+                        <a:t>-</a:t>
                       </a:r>
                     </a:p>
                   </a:txBody>
@@ -11953,29 +11601,7 @@
                           </a:solidFill>
                           <a:latin typeface="Calibri"/>
                         </a:rPr>
-                        <a:t>Não localizado no</a:t>
-                      </a:r>
-                    </a:p>
-                    <a:p>
-                      <a:pPr algn="ctr">
-                        <a:lnSpc>
-                          <a:spcPct val="100000"/>
-                        </a:lnSpc>
-                        <a:spcBef>
-                          <a:spcPts val="0"/>
-                        </a:spcBef>
-                        <a:spcAft>
-                          <a:spcPts val="0"/>
-                        </a:spcAft>
-                      </a:pPr>
-                      <a:r>
-                        <a:rPr sz="1300" b="0">
-                          <a:solidFill>
-                            <a:srgbClr val="1F1F1F"/>
-                          </a:solidFill>
-                          <a:latin typeface="Calibri"/>
-                        </a:rPr>
-                        <a:t>corpus acessível</a:t>
+                        <a:t>-</a:t>
                       </a:r>
                     </a:p>
                   </a:txBody>
@@ -12414,29 +12040,7 @@
                           </a:solidFill>
                           <a:latin typeface="Calibri"/>
                         </a:rPr>
-                        <a:t>Não localizado no</a:t>
-                      </a:r>
-                    </a:p>
-                    <a:p>
-                      <a:pPr algn="ctr">
-                        <a:lnSpc>
-                          <a:spcPct val="100000"/>
-                        </a:lnSpc>
-                        <a:spcBef>
-                          <a:spcPts val="0"/>
-                        </a:spcBef>
-                        <a:spcAft>
-                          <a:spcPts val="0"/>
-                        </a:spcAft>
-                      </a:pPr>
-                      <a:r>
-                        <a:rPr sz="1300" b="0">
-                          <a:solidFill>
-                            <a:srgbClr val="1F1F1F"/>
-                          </a:solidFill>
-                          <a:latin typeface="Calibri"/>
-                        </a:rPr>
-                        <a:t>corpus acessível</a:t>
+                        <a:t>-</a:t>
                       </a:r>
                     </a:p>
                   </a:txBody>
@@ -12600,51 +12204,7 @@
                           </a:solidFill>
                           <a:latin typeface="Calibri"/>
                         </a:rPr>
-                        <a:t>administração;</a:t>
-                      </a:r>
-                    </a:p>
-                    <a:p>
-                      <a:pPr algn="ctr">
-                        <a:lnSpc>
-                          <a:spcPct val="100000"/>
-                        </a:lnSpc>
-                        <a:spcBef>
-                          <a:spcPts val="0"/>
-                        </a:spcBef>
-                        <a:spcAft>
-                          <a:spcPts val="0"/>
-                        </a:spcAft>
-                      </a:pPr>
-                      <a:r>
-                        <a:rPr sz="1300" b="0">
-                          <a:solidFill>
-                            <a:srgbClr val="1F1F1F"/>
-                          </a:solidFill>
-                          <a:latin typeface="Calibri"/>
-                        </a:rPr>
-                        <a:t>percentual próprio não</a:t>
-                      </a:r>
-                    </a:p>
-                    <a:p>
-                      <a:pPr algn="ctr">
-                        <a:lnSpc>
-                          <a:spcPct val="100000"/>
-                        </a:lnSpc>
-                        <a:spcBef>
-                          <a:spcPts val="0"/>
-                        </a:spcBef>
-                        <a:spcAft>
-                          <a:spcPts val="0"/>
-                        </a:spcAft>
-                      </a:pPr>
-                      <a:r>
-                        <a:rPr sz="1300" b="0">
-                          <a:solidFill>
-                            <a:srgbClr val="1F1F1F"/>
-                          </a:solidFill>
-                          <a:latin typeface="Calibri"/>
-                        </a:rPr>
-                        <a:t>segregado</a:t>
+                        <a:t>administração</a:t>
                       </a:r>
                     </a:p>
                   </a:txBody>
@@ -12850,7 +12410,7 @@
                       <a:r>
                         <a:rPr sz="1300" b="1">
                           <a:solidFill>
-                            <a:srgbClr val="1F1F1F"/>
+                            <a:srgbClr val="FFFFFF"/>
                           </a:solidFill>
                           <a:latin typeface="Calibri"/>
                         </a:rPr>
@@ -12860,7 +12420,7 @@
                   </a:txBody>
                   <a:tcPr marL="91440" marR="91440" marT="41148" marB="41148" anchor="ctr">
                     <a:solidFill>
-                      <a:srgbClr val="EC7000"/>
+                      <a:srgbClr val="FF6200"/>
                     </a:solidFill>
                     <a:lnL>
                       <a:noFill/>
@@ -12899,7 +12459,7 @@
                       <a:r>
                         <a:rPr sz="1300" b="1">
                           <a:solidFill>
-                            <a:srgbClr val="1F1F1F"/>
+                            <a:srgbClr val="FFFFFF"/>
                           </a:solidFill>
                           <a:latin typeface="Calibri"/>
                         </a:rPr>
@@ -12909,7 +12469,7 @@
                   </a:txBody>
                   <a:tcPr marL="91440" marR="91440" marT="41148" marB="41148" anchor="ctr">
                     <a:solidFill>
-                      <a:srgbClr val="EC7000"/>
+                      <a:srgbClr val="FF6200"/>
                     </a:solidFill>
                     <a:lnL>
                       <a:noFill/>
@@ -12948,7 +12508,7 @@
                       <a:r>
                         <a:rPr sz="1300" b="1">
                           <a:solidFill>
-                            <a:srgbClr val="1F1F1F"/>
+                            <a:srgbClr val="FFFFFF"/>
                           </a:solidFill>
                           <a:latin typeface="Calibri"/>
                         </a:rPr>
@@ -12958,7 +12518,7 @@
                   </a:txBody>
                   <a:tcPr marL="91440" marR="91440" marT="41148" marB="41148" anchor="ctr">
                     <a:solidFill>
-                      <a:srgbClr val="EC7000"/>
+                      <a:srgbClr val="FF6200"/>
                     </a:solidFill>
                     <a:lnL>
                       <a:noFill/>
@@ -12997,7 +12557,7 @@
                       <a:r>
                         <a:rPr sz="1300" b="1">
                           <a:solidFill>
-                            <a:srgbClr val="1F1F1F"/>
+                            <a:srgbClr val="FFFFFF"/>
                           </a:solidFill>
                           <a:latin typeface="Calibri"/>
                         </a:rPr>
@@ -13007,7 +12567,7 @@
                   </a:txBody>
                   <a:tcPr marL="91440" marR="91440" marT="41148" marB="41148" anchor="ctr">
                     <a:solidFill>
-                      <a:srgbClr val="EC7000"/>
+                      <a:srgbClr val="FF6200"/>
                     </a:solidFill>
                     <a:lnL>
                       <a:noFill/>
@@ -13237,29 +12797,7 @@
                           </a:solidFill>
                           <a:latin typeface="Calibri"/>
                         </a:rPr>
-                        <a:t>Não localizado no corpus</a:t>
-                      </a:r>
-                    </a:p>
-                    <a:p>
-                      <a:pPr algn="ctr">
-                        <a:lnSpc>
-                          <a:spcPct val="100000"/>
-                        </a:lnSpc>
-                        <a:spcBef>
-                          <a:spcPts val="0"/>
-                        </a:spcBef>
-                        <a:spcAft>
-                          <a:spcPts val="0"/>
-                        </a:spcAft>
-                      </a:pPr>
-                      <a:r>
-                        <a:rPr sz="1300" b="0">
-                          <a:solidFill>
-                            <a:srgbClr val="1F1F1F"/>
-                          </a:solidFill>
-                          <a:latin typeface="Calibri"/>
-                        </a:rPr>
-                        <a:t>acessível</a:t>
+                        <a:t>-</a:t>
                       </a:r>
                     </a:p>
                   </a:txBody>
@@ -13355,29 +12893,7 @@
                           </a:solidFill>
                           <a:latin typeface="Calibri"/>
                         </a:rPr>
-                        <a:t>0,45% a.a. do PL + tributos;</a:t>
-                      </a:r>
-                    </a:p>
-                    <a:p>
-                      <a:pPr algn="ctr">
-                        <a:lnSpc>
-                          <a:spcPct val="100000"/>
-                        </a:lnSpc>
-                        <a:spcBef>
-                          <a:spcPts val="0"/>
-                        </a:spcBef>
-                        <a:spcAft>
-                          <a:spcPts val="0"/>
-                        </a:spcAft>
-                      </a:pPr>
-                      <a:r>
-                        <a:rPr sz="1300" b="0">
-                          <a:solidFill>
-                            <a:srgbClr val="1F1F1F"/>
-                          </a:solidFill>
-                          <a:latin typeface="Calibri"/>
-                        </a:rPr>
-                        <a:t>mínimo próprio não localizado</a:t>
+                        <a:t>0,45% a.a. do PL + tributos</a:t>
                       </a:r>
                     </a:p>
                   </a:txBody>
@@ -13493,29 +13009,7 @@
                           </a:solidFill>
                           <a:latin typeface="Calibri"/>
                         </a:rPr>
-                        <a:t>Não localizado no corpus</a:t>
-                      </a:r>
-                    </a:p>
-                    <a:p>
-                      <a:pPr algn="ctr">
-                        <a:lnSpc>
-                          <a:spcPct val="100000"/>
-                        </a:lnSpc>
-                        <a:spcBef>
-                          <a:spcPts val="0"/>
-                        </a:spcBef>
-                        <a:spcAft>
-                          <a:spcPts val="0"/>
-                        </a:spcAft>
-                      </a:pPr>
-                      <a:r>
-                        <a:rPr sz="1300" b="0">
-                          <a:solidFill>
-                            <a:srgbClr val="1F1F1F"/>
-                          </a:solidFill>
-                          <a:latin typeface="Calibri"/>
-                        </a:rPr>
-                        <a:t>acessível</a:t>
+                        <a:t>-</a:t>
                       </a:r>
                     </a:p>
                   </a:txBody>
@@ -13755,29 +13249,7 @@
                           </a:solidFill>
                           <a:latin typeface="Calibri"/>
                         </a:rPr>
-                        <a:t>Não localizado no corpus</a:t>
-                      </a:r>
-                    </a:p>
-                    <a:p>
-                      <a:pPr algn="ctr">
-                        <a:lnSpc>
-                          <a:spcPct val="100000"/>
-                        </a:lnSpc>
-                        <a:spcBef>
-                          <a:spcPts val="0"/>
-                        </a:spcBef>
-                        <a:spcAft>
-                          <a:spcPts val="0"/>
-                        </a:spcAft>
-                      </a:pPr>
-                      <a:r>
-                        <a:rPr sz="1300" b="0">
-                          <a:solidFill>
-                            <a:srgbClr val="1F1F1F"/>
-                          </a:solidFill>
-                          <a:latin typeface="Calibri"/>
-                        </a:rPr>
-                        <a:t>acessível</a:t>
+                        <a:t>-</a:t>
                       </a:r>
                     </a:p>
                   </a:txBody>
@@ -13984,7 +13456,7 @@
                       <a:r>
                         <a:rPr sz="1300" b="1">
                           <a:solidFill>
-                            <a:srgbClr val="1F1F1F"/>
+                            <a:srgbClr val="FFFFFF"/>
                           </a:solidFill>
                           <a:latin typeface="Calibri"/>
                         </a:rPr>
@@ -13994,7 +13466,7 @@
                   </a:txBody>
                   <a:tcPr marL="91440" marR="91440" marT="41148" marB="41148" anchor="ctr">
                     <a:solidFill>
-                      <a:srgbClr val="EC7000"/>
+                      <a:srgbClr val="FF6200"/>
                     </a:solidFill>
                     <a:lnL>
                       <a:noFill/>
@@ -14033,7 +13505,7 @@
                       <a:r>
                         <a:rPr sz="1300" b="1">
                           <a:solidFill>
-                            <a:srgbClr val="1F1F1F"/>
+                            <a:srgbClr val="FFFFFF"/>
                           </a:solidFill>
                           <a:latin typeface="Calibri"/>
                         </a:rPr>
@@ -14043,7 +13515,7 @@
                   </a:txBody>
                   <a:tcPr marL="91440" marR="91440" marT="41148" marB="41148" anchor="ctr">
                     <a:solidFill>
-                      <a:srgbClr val="EC7000"/>
+                      <a:srgbClr val="FF6200"/>
                     </a:solidFill>
                     <a:lnL>
                       <a:noFill/>
@@ -14082,7 +13554,7 @@
                       <a:r>
                         <a:rPr sz="1300" b="1">
                           <a:solidFill>
-                            <a:srgbClr val="1F1F1F"/>
+                            <a:srgbClr val="FFFFFF"/>
                           </a:solidFill>
                           <a:latin typeface="Calibri"/>
                         </a:rPr>
@@ -14092,7 +13564,7 @@
                   </a:txBody>
                   <a:tcPr marL="91440" marR="91440" marT="41148" marB="41148" anchor="ctr">
                     <a:solidFill>
-                      <a:srgbClr val="EC7000"/>
+                      <a:srgbClr val="FF6200"/>
                     </a:solidFill>
                     <a:lnL>
                       <a:noFill/>
@@ -14131,7 +13603,7 @@
                       <a:r>
                         <a:rPr sz="1300" b="1">
                           <a:solidFill>
-                            <a:srgbClr val="1F1F1F"/>
+                            <a:srgbClr val="FFFFFF"/>
                           </a:solidFill>
                           <a:latin typeface="Calibri"/>
                         </a:rPr>
@@ -14141,7 +13613,7 @@
                   </a:txBody>
                   <a:tcPr marL="91440" marR="91440" marT="41148" marB="41148" anchor="ctr">
                     <a:solidFill>
-                      <a:srgbClr val="EC7000"/>
+                      <a:srgbClr val="FF6200"/>
                     </a:solidFill>
                     <a:lnL>
                       <a:noFill/>
@@ -14180,7 +13652,7 @@
                       <a:r>
                         <a:rPr sz="1300" b="1">
                           <a:solidFill>
-                            <a:srgbClr val="1F1F1F"/>
+                            <a:srgbClr val="FFFFFF"/>
                           </a:solidFill>
                           <a:latin typeface="Calibri"/>
                         </a:rPr>
@@ -14190,7 +13662,7 @@
                   </a:txBody>
                   <a:tcPr marL="91440" marR="91440" marT="41148" marB="41148" anchor="ctr">
                     <a:solidFill>
-                      <a:srgbClr val="EC7000"/>
+                      <a:srgbClr val="FF6200"/>
                     </a:solidFill>
                     <a:lnL>
                       <a:noFill/>
@@ -14417,29 +13889,7 @@
                           </a:solidFill>
                           <a:latin typeface="Calibri"/>
                         </a:rPr>
-                        <a:t>Não localizado no</a:t>
-                      </a:r>
-                    </a:p>
-                    <a:p>
-                      <a:pPr algn="ctr">
-                        <a:lnSpc>
-                          <a:spcPct val="100000"/>
-                        </a:lnSpc>
-                        <a:spcBef>
-                          <a:spcPts val="0"/>
-                        </a:spcBef>
-                        <a:spcAft>
-                          <a:spcPts val="0"/>
-                        </a:spcAft>
-                      </a:pPr>
-                      <a:r>
-                        <a:rPr sz="1300" b="0">
-                          <a:solidFill>
-                            <a:srgbClr val="1F1F1F"/>
-                          </a:solidFill>
-                          <a:latin typeface="Calibri"/>
-                        </a:rPr>
-                        <a:t>corpus acessível</a:t>
+                        <a:t>-</a:t>
                       </a:r>
                     </a:p>
                   </a:txBody>
@@ -14621,51 +14071,7 @@
                           </a:solidFill>
                           <a:latin typeface="Calibri"/>
                         </a:rPr>
-                        <a:t>júnior/PL diretos;</a:t>
-                      </a:r>
-                    </a:p>
-                    <a:p>
-                      <a:pPr algn="ctr">
-                        <a:lnSpc>
-                          <a:spcPct val="100000"/>
-                        </a:lnSpc>
-                        <a:spcBef>
-                          <a:spcPts val="0"/>
-                        </a:spcBef>
-                        <a:spcAft>
-                          <a:spcPts val="0"/>
-                        </a:spcAft>
-                      </a:pPr>
-                      <a:r>
-                        <a:rPr sz="1300" b="0">
-                          <a:solidFill>
-                            <a:srgbClr val="1F1F1F"/>
-                          </a:solidFill>
-                          <a:latin typeface="Calibri"/>
-                        </a:rPr>
-                        <a:t>validar identificação</a:t>
-                      </a:r>
-                    </a:p>
-                    <a:p>
-                      <a:pPr algn="ctr">
-                        <a:lnSpc>
-                          <a:spcPct val="100000"/>
-                        </a:lnSpc>
-                        <a:spcBef>
-                          <a:spcPts val="0"/>
-                        </a:spcBef>
-                        <a:spcAft>
-                          <a:spcPts val="0"/>
-                        </a:spcAft>
-                      </a:pPr>
-                      <a:r>
-                        <a:rPr sz="1300" b="0">
-                          <a:solidFill>
-                            <a:srgbClr val="1F1F1F"/>
-                          </a:solidFill>
-                          <a:latin typeface="Calibri"/>
-                        </a:rPr>
-                        <a:t>de cada subclasse</a:t>
+                        <a:t>júnior/PL diretos</a:t>
                       </a:r>
                     </a:p>
                   </a:txBody>
@@ -14874,29 +14280,7 @@
                           </a:solidFill>
                           <a:latin typeface="Calibri"/>
                         </a:rPr>
-                        <a:t>Não localizado no</a:t>
-                      </a:r>
-                    </a:p>
-                    <a:p>
-                      <a:pPr algn="ctr">
-                        <a:lnSpc>
-                          <a:spcPct val="100000"/>
-                        </a:lnSpc>
-                        <a:spcBef>
-                          <a:spcPts val="0"/>
-                        </a:spcBef>
-                        <a:spcAft>
-                          <a:spcPts val="0"/>
-                        </a:spcAft>
-                      </a:pPr>
-                      <a:r>
-                        <a:rPr sz="1300" b="0">
-                          <a:solidFill>
-                            <a:srgbClr val="1F1F1F"/>
-                          </a:solidFill>
-                          <a:latin typeface="Calibri"/>
-                        </a:rPr>
-                        <a:t>corpus acessível</a:t>
+                        <a:t>-</a:t>
                       </a:r>
                     </a:p>
                   </a:txBody>
@@ -15902,51 +15286,7 @@
                           </a:solidFill>
                           <a:latin typeface="Calibri"/>
                         </a:rPr>
-                        <a:t>Sem competência IME</a:t>
-                      </a:r>
-                    </a:p>
-                    <a:p>
-                      <a:pPr algn="ctr">
-                        <a:lnSpc>
-                          <a:spcPct val="100000"/>
-                        </a:lnSpc>
-                        <a:spcBef>
-                          <a:spcPts val="0"/>
-                        </a:spcBef>
-                        <a:spcAft>
-                          <a:spcPts val="0"/>
-                        </a:spcAft>
-                      </a:pPr>
-                      <a:r>
-                        <a:rPr sz="1300" b="0">
-                          <a:solidFill>
-                            <a:srgbClr val="1F1F1F"/>
-                          </a:solidFill>
-                          <a:latin typeface="Calibri"/>
-                        </a:rPr>
-                        <a:t>carregada em cache</a:t>
-                      </a:r>
-                    </a:p>
-                    <a:p>
-                      <a:pPr algn="ctr">
-                        <a:lnSpc>
-                          <a:spcPct val="100000"/>
-                        </a:lnSpc>
-                        <a:spcBef>
-                          <a:spcPts val="0"/>
-                        </a:spcBef>
-                        <a:spcAft>
-                          <a:spcPts val="0"/>
-                        </a:spcAft>
-                      </a:pPr>
-                      <a:r>
-                        <a:rPr sz="1300" b="0">
-                          <a:solidFill>
-                            <a:srgbClr val="1F1F1F"/>
-                          </a:solidFill>
-                          <a:latin typeface="Calibri"/>
-                        </a:rPr>
-                        <a:t>local</a:t>
+                        <a:t>-</a:t>
                       </a:r>
                     </a:p>
                   </a:txBody>
@@ -15995,51 +15335,7 @@
                           </a:solidFill>
                           <a:latin typeface="Calibri"/>
                         </a:rPr>
-                        <a:t>Sem competência IME</a:t>
-                      </a:r>
-                    </a:p>
-                    <a:p>
-                      <a:pPr algn="ctr">
-                        <a:lnSpc>
-                          <a:spcPct val="100000"/>
-                        </a:lnSpc>
-                        <a:spcBef>
-                          <a:spcPts val="0"/>
-                        </a:spcBef>
-                        <a:spcAft>
-                          <a:spcPts val="0"/>
-                        </a:spcAft>
-                      </a:pPr>
-                      <a:r>
-                        <a:rPr sz="1300" b="0">
-                          <a:solidFill>
-                            <a:srgbClr val="1F1F1F"/>
-                          </a:solidFill>
-                          <a:latin typeface="Calibri"/>
-                        </a:rPr>
-                        <a:t>carregada em cache</a:t>
-                      </a:r>
-                    </a:p>
-                    <a:p>
-                      <a:pPr algn="ctr">
-                        <a:lnSpc>
-                          <a:spcPct val="100000"/>
-                        </a:lnSpc>
-                        <a:spcBef>
-                          <a:spcPts val="0"/>
-                        </a:spcBef>
-                        <a:spcAft>
-                          <a:spcPts val="0"/>
-                        </a:spcAft>
-                      </a:pPr>
-                      <a:r>
-                        <a:rPr sz="1300" b="0">
-                          <a:solidFill>
-                            <a:srgbClr val="1F1F1F"/>
-                          </a:solidFill>
-                          <a:latin typeface="Calibri"/>
-                        </a:rPr>
-                        <a:t>local</a:t>
+                        <a:t>-</a:t>
                       </a:r>
                     </a:p>
                   </a:txBody>
@@ -16338,7 +15634,7 @@
                       <a:r>
                         <a:rPr sz="1300" b="1">
                           <a:solidFill>
-                            <a:srgbClr val="1F1F1F"/>
+                            <a:srgbClr val="FFFFFF"/>
                           </a:solidFill>
                           <a:latin typeface="Calibri"/>
                         </a:rPr>
@@ -16348,7 +15644,7 @@
                   </a:txBody>
                   <a:tcPr marL="91440" marR="91440" marT="41148" marB="41148" anchor="ctr">
                     <a:solidFill>
-                      <a:srgbClr val="EC7000"/>
+                      <a:srgbClr val="FF6200"/>
                     </a:solidFill>
                     <a:lnL>
                       <a:noFill/>
@@ -16387,7 +15683,7 @@
                       <a:r>
                         <a:rPr sz="1300" b="1">
                           <a:solidFill>
-                            <a:srgbClr val="1F1F1F"/>
+                            <a:srgbClr val="FFFFFF"/>
                           </a:solidFill>
                           <a:latin typeface="Calibri"/>
                         </a:rPr>
@@ -16397,7 +15693,7 @@
                   </a:txBody>
                   <a:tcPr marL="91440" marR="91440" marT="41148" marB="41148" anchor="ctr">
                     <a:solidFill>
-                      <a:srgbClr val="EC7000"/>
+                      <a:srgbClr val="FF6200"/>
                     </a:solidFill>
                     <a:lnL>
                       <a:noFill/>
@@ -16436,7 +15732,7 @@
                       <a:r>
                         <a:rPr sz="1300" b="1">
                           <a:solidFill>
-                            <a:srgbClr val="1F1F1F"/>
+                            <a:srgbClr val="FFFFFF"/>
                           </a:solidFill>
                           <a:latin typeface="Calibri"/>
                         </a:rPr>
@@ -16446,7 +15742,7 @@
                   </a:txBody>
                   <a:tcPr marL="91440" marR="91440" marT="41148" marB="41148" anchor="ctr">
                     <a:solidFill>
-                      <a:srgbClr val="EC7000"/>
+                      <a:srgbClr val="FF6200"/>
                     </a:solidFill>
                     <a:lnL>
                       <a:noFill/>
@@ -16485,7 +15781,7 @@
                       <a:r>
                         <a:rPr sz="1300" b="1">
                           <a:solidFill>
-                            <a:srgbClr val="1F1F1F"/>
+                            <a:srgbClr val="FFFFFF"/>
                           </a:solidFill>
                           <a:latin typeface="Calibri"/>
                         </a:rPr>
@@ -16495,7 +15791,7 @@
                   </a:txBody>
                   <a:tcPr marL="91440" marR="91440" marT="41148" marB="41148" anchor="ctr">
                     <a:solidFill>
-                      <a:srgbClr val="EC7000"/>
+                      <a:srgbClr val="FF6200"/>
                     </a:solidFill>
                     <a:lnL>
                       <a:noFill/>
@@ -16769,29 +16065,7 @@
                           </a:solidFill>
                           <a:latin typeface="Calibri"/>
                         </a:rPr>
-                        <a:t>Não localizado no corpus</a:t>
-                      </a:r>
-                    </a:p>
-                    <a:p>
-                      <a:pPr algn="ctr">
-                        <a:lnSpc>
-                          <a:spcPct val="100000"/>
-                        </a:lnSpc>
-                        <a:spcBef>
-                          <a:spcPts val="0"/>
-                        </a:spcBef>
-                        <a:spcAft>
-                          <a:spcPts val="0"/>
-                        </a:spcAft>
-                      </a:pPr>
-                      <a:r>
-                        <a:rPr sz="1300" b="0">
-                          <a:solidFill>
-                            <a:srgbClr val="1F1F1F"/>
-                          </a:solidFill>
-                          <a:latin typeface="Calibri"/>
-                        </a:rPr>
-                        <a:t>acessível</a:t>
+                        <a:t>-</a:t>
                       </a:r>
                     </a:p>
                   </a:txBody>
@@ -17069,29 +16343,7 @@
                           </a:solidFill>
                           <a:latin typeface="Calibri"/>
                         </a:rPr>
-                        <a:t>Não localizado no corpus</a:t>
-                      </a:r>
-                    </a:p>
-                    <a:p>
-                      <a:pPr algn="ctr">
-                        <a:lnSpc>
-                          <a:spcPct val="100000"/>
-                        </a:lnSpc>
-                        <a:spcBef>
-                          <a:spcPts val="0"/>
-                        </a:spcBef>
-                        <a:spcAft>
-                          <a:spcPts val="0"/>
-                        </a:spcAft>
-                      </a:pPr>
-                      <a:r>
-                        <a:rPr sz="1300" b="0">
-                          <a:solidFill>
-                            <a:srgbClr val="1F1F1F"/>
-                          </a:solidFill>
-                          <a:latin typeface="Calibri"/>
-                        </a:rPr>
-                        <a:t>acessível</a:t>
+                        <a:t>-</a:t>
                       </a:r>
                     </a:p>
                   </a:txBody>
@@ -17582,29 +16834,7 @@
                           </a:solidFill>
                           <a:latin typeface="Calibri"/>
                         </a:rPr>
-                        <a:t>Sem competência IME carregada em</a:t>
-                      </a:r>
-                    </a:p>
-                    <a:p>
-                      <a:pPr algn="ctr">
-                        <a:lnSpc>
-                          <a:spcPct val="100000"/>
-                        </a:lnSpc>
-                        <a:spcBef>
-                          <a:spcPts val="0"/>
-                        </a:spcBef>
-                        <a:spcAft>
-                          <a:spcPts val="0"/>
-                        </a:spcAft>
-                      </a:pPr>
-                      <a:r>
-                        <a:rPr sz="1300" b="0">
-                          <a:solidFill>
-                            <a:srgbClr val="1F1F1F"/>
-                          </a:solidFill>
-                          <a:latin typeface="Calibri"/>
-                        </a:rPr>
-                        <a:t>cache local</a:t>
+                        <a:t>-</a:t>
                       </a:r>
                     </a:p>
                   </a:txBody>
@@ -17653,29 +16883,7 @@
                           </a:solidFill>
                           <a:latin typeface="Calibri"/>
                         </a:rPr>
-                        <a:t>Sem competência IME carregada em</a:t>
-                      </a:r>
-                    </a:p>
-                    <a:p>
-                      <a:pPr algn="ctr">
-                        <a:lnSpc>
-                          <a:spcPct val="100000"/>
-                        </a:lnSpc>
-                        <a:spcBef>
-                          <a:spcPts val="0"/>
-                        </a:spcBef>
-                        <a:spcAft>
-                          <a:spcPts val="0"/>
-                        </a:spcAft>
-                      </a:pPr>
-                      <a:r>
-                        <a:rPr sz="1300" b="0">
-                          <a:solidFill>
-                            <a:srgbClr val="1F1F1F"/>
-                          </a:solidFill>
-                          <a:latin typeface="Calibri"/>
-                        </a:rPr>
-                        <a:t>cache local</a:t>
+                        <a:t>-</a:t>
                       </a:r>
                     </a:p>
                   </a:txBody>
@@ -17881,7 +17089,7 @@
                       <a:r>
                         <a:rPr sz="1300" b="1">
                           <a:solidFill>
-                            <a:srgbClr val="1F1F1F"/>
+                            <a:srgbClr val="FFFFFF"/>
                           </a:solidFill>
                           <a:latin typeface="Calibri"/>
                         </a:rPr>
@@ -17891,7 +17099,7 @@
                   </a:txBody>
                   <a:tcPr marL="91440" marR="91440" marT="41148" marB="41148" anchor="ctr">
                     <a:solidFill>
-                      <a:srgbClr val="EC7000"/>
+                      <a:srgbClr val="FF6200"/>
                     </a:solidFill>
                     <a:lnL>
                       <a:noFill/>
@@ -17930,7 +17138,7 @@
                       <a:r>
                         <a:rPr sz="1300" b="1">
                           <a:solidFill>
-                            <a:srgbClr val="1F1F1F"/>
+                            <a:srgbClr val="FFFFFF"/>
                           </a:solidFill>
                           <a:latin typeface="Calibri"/>
                         </a:rPr>
@@ -17940,7 +17148,7 @@
                   </a:txBody>
                   <a:tcPr marL="91440" marR="91440" marT="41148" marB="41148" anchor="ctr">
                     <a:solidFill>
-                      <a:srgbClr val="EC7000"/>
+                      <a:srgbClr val="FF6200"/>
                     </a:solidFill>
                     <a:lnL>
                       <a:noFill/>
@@ -17979,7 +17187,7 @@
                       <a:r>
                         <a:rPr sz="1300" b="1">
                           <a:solidFill>
-                            <a:srgbClr val="1F1F1F"/>
+                            <a:srgbClr val="FFFFFF"/>
                           </a:solidFill>
                           <a:latin typeface="Calibri"/>
                         </a:rPr>
@@ -17989,7 +17197,7 @@
                   </a:txBody>
                   <a:tcPr marL="91440" marR="91440" marT="41148" marB="41148" anchor="ctr">
                     <a:solidFill>
-                      <a:srgbClr val="EC7000"/>
+                      <a:srgbClr val="FF6200"/>
                     </a:solidFill>
                     <a:lnL>
                       <a:noFill/>
@@ -18028,7 +17236,7 @@
                       <a:r>
                         <a:rPr sz="1300" b="1">
                           <a:solidFill>
-                            <a:srgbClr val="1F1F1F"/>
+                            <a:srgbClr val="FFFFFF"/>
                           </a:solidFill>
                           <a:latin typeface="Calibri"/>
                         </a:rPr>
@@ -18038,7 +17246,7 @@
                   </a:txBody>
                   <a:tcPr marL="91440" marR="91440" marT="41148" marB="41148" anchor="ctr">
                     <a:solidFill>
-                      <a:srgbClr val="EC7000"/>
+                      <a:srgbClr val="FF6200"/>
                     </a:solidFill>
                     <a:lnL>
                       <a:noFill/>
@@ -18268,29 +17476,7 @@
                           </a:solidFill>
                           <a:latin typeface="Calibri"/>
                         </a:rPr>
-                        <a:t>Não localizado no corpus</a:t>
-                      </a:r>
-                    </a:p>
-                    <a:p>
-                      <a:pPr algn="ctr">
-                        <a:lnSpc>
-                          <a:spcPct val="100000"/>
-                        </a:lnSpc>
-                        <a:spcBef>
-                          <a:spcPts val="0"/>
-                        </a:spcBef>
-                        <a:spcAft>
-                          <a:spcPts val="0"/>
-                        </a:spcAft>
-                      </a:pPr>
-                      <a:r>
-                        <a:rPr sz="1300" b="0">
-                          <a:solidFill>
-                            <a:srgbClr val="1F1F1F"/>
-                          </a:solidFill>
-                          <a:latin typeface="Calibri"/>
-                        </a:rPr>
-                        <a:t>acessível</a:t>
+                        <a:t>-</a:t>
                       </a:r>
                     </a:p>
                   </a:txBody>
@@ -18386,29 +17572,7 @@
                           </a:solidFill>
                           <a:latin typeface="Calibri"/>
                         </a:rPr>
-                        <a:t>Não localizado no corpus</a:t>
-                      </a:r>
-                    </a:p>
-                    <a:p>
-                      <a:pPr algn="ctr">
-                        <a:lnSpc>
-                          <a:spcPct val="100000"/>
-                        </a:lnSpc>
-                        <a:spcBef>
-                          <a:spcPts val="0"/>
-                        </a:spcBef>
-                        <a:spcAft>
-                          <a:spcPts val="0"/>
-                        </a:spcAft>
-                      </a:pPr>
-                      <a:r>
-                        <a:rPr sz="1300" b="0">
-                          <a:solidFill>
-                            <a:srgbClr val="1F1F1F"/>
-                          </a:solidFill>
-                          <a:latin typeface="Calibri"/>
-                        </a:rPr>
-                        <a:t>acessível</a:t>
+                        <a:t>-</a:t>
                       </a:r>
                     </a:p>
                   </a:txBody>
@@ -18524,29 +17688,7 @@
                           </a:solidFill>
                           <a:latin typeface="Calibri"/>
                         </a:rPr>
-                        <a:t>Não localizado no corpus</a:t>
-                      </a:r>
-                    </a:p>
-                    <a:p>
-                      <a:pPr algn="ctr">
-                        <a:lnSpc>
-                          <a:spcPct val="100000"/>
-                        </a:lnSpc>
-                        <a:spcBef>
-                          <a:spcPts val="0"/>
-                        </a:spcBef>
-                        <a:spcAft>
-                          <a:spcPts val="0"/>
-                        </a:spcAft>
-                      </a:pPr>
-                      <a:r>
-                        <a:rPr sz="1300" b="0">
-                          <a:solidFill>
-                            <a:srgbClr val="1F1F1F"/>
-                          </a:solidFill>
-                          <a:latin typeface="Calibri"/>
-                        </a:rPr>
-                        <a:t>acessível</a:t>
+                        <a:t>-</a:t>
                       </a:r>
                     </a:p>
                   </a:txBody>
@@ -18802,29 +17944,7 @@
                           </a:solidFill>
                           <a:latin typeface="Calibri"/>
                         </a:rPr>
-                        <a:t>Não localizado no corpus</a:t>
-                      </a:r>
-                    </a:p>
-                    <a:p>
-                      <a:pPr algn="ctr">
-                        <a:lnSpc>
-                          <a:spcPct val="100000"/>
-                        </a:lnSpc>
-                        <a:spcBef>
-                          <a:spcPts val="0"/>
-                        </a:spcBef>
-                        <a:spcAft>
-                          <a:spcPts val="0"/>
-                        </a:spcAft>
-                      </a:pPr>
-                      <a:r>
-                        <a:rPr sz="1300" b="0">
-                          <a:solidFill>
-                            <a:srgbClr val="1F1F1F"/>
-                          </a:solidFill>
-                          <a:latin typeface="Calibri"/>
-                        </a:rPr>
-                        <a:t>acessível</a:t>
+                        <a:t>-</a:t>
                       </a:r>
                     </a:p>
                   </a:txBody>
@@ -19102,29 +18222,7 @@
                           </a:solidFill>
                           <a:latin typeface="Calibri"/>
                         </a:rPr>
-                        <a:t>Não localizado no corpus</a:t>
-                      </a:r>
-                    </a:p>
-                    <a:p>
-                      <a:pPr algn="ctr">
-                        <a:lnSpc>
-                          <a:spcPct val="100000"/>
-                        </a:lnSpc>
-                        <a:spcBef>
-                          <a:spcPts val="0"/>
-                        </a:spcBef>
-                        <a:spcAft>
-                          <a:spcPts val="0"/>
-                        </a:spcAft>
-                      </a:pPr>
-                      <a:r>
-                        <a:rPr sz="1300" b="0">
-                          <a:solidFill>
-                            <a:srgbClr val="1F1F1F"/>
-                          </a:solidFill>
-                          <a:latin typeface="Calibri"/>
-                        </a:rPr>
-                        <a:t>acessível</a:t>
+                        <a:t>-</a:t>
                       </a:r>
                     </a:p>
                   </a:txBody>
@@ -19402,29 +18500,7 @@
                           </a:solidFill>
                           <a:latin typeface="Calibri"/>
                         </a:rPr>
-                        <a:t>Não localizado no corpus</a:t>
-                      </a:r>
-                    </a:p>
-                    <a:p>
-                      <a:pPr algn="ctr">
-                        <a:lnSpc>
-                          <a:spcPct val="100000"/>
-                        </a:lnSpc>
-                        <a:spcBef>
-                          <a:spcPts val="0"/>
-                        </a:spcBef>
-                        <a:spcAft>
-                          <a:spcPts val="0"/>
-                        </a:spcAft>
-                      </a:pPr>
-                      <a:r>
-                        <a:rPr sz="1300" b="0">
-                          <a:solidFill>
-                            <a:srgbClr val="1F1F1F"/>
-                          </a:solidFill>
-                          <a:latin typeface="Calibri"/>
-                        </a:rPr>
-                        <a:t>acessível</a:t>
+                        <a:t>-</a:t>
                       </a:r>
                     </a:p>
                   </a:txBody>
@@ -19642,29 +18718,7 @@
                           </a:solidFill>
                           <a:latin typeface="Calibri"/>
                         </a:rPr>
-                        <a:t>Não localizado no corpus</a:t>
-                      </a:r>
-                    </a:p>
-                    <a:p>
-                      <a:pPr algn="ctr">
-                        <a:lnSpc>
-                          <a:spcPct val="100000"/>
-                        </a:lnSpc>
-                        <a:spcBef>
-                          <a:spcPts val="0"/>
-                        </a:spcBef>
-                        <a:spcAft>
-                          <a:spcPts val="0"/>
-                        </a:spcAft>
-                      </a:pPr>
-                      <a:r>
-                        <a:rPr sz="1300" b="0">
-                          <a:solidFill>
-                            <a:srgbClr val="1F1F1F"/>
-                          </a:solidFill>
-                          <a:latin typeface="Calibri"/>
-                        </a:rPr>
-                        <a:t>acessível</a:t>
+                        <a:t>-</a:t>
                       </a:r>
                     </a:p>
                   </a:txBody>
@@ -19834,7 +18888,7 @@
         </p:nvGraphicFramePr>
         <p:xfrm>
           <a:off x="438912" y="932688"/>
-          <a:ext cx="11313868" cy="3685030"/>
+          <a:ext cx="11313868" cy="3497578"/>
         </p:xfrm>
         <a:graphic>
           <a:graphicData uri="http://schemas.openxmlformats.org/drawingml/2006/table">
@@ -19871,7 +18925,7 @@
                       <a:r>
                         <a:rPr sz="1300" b="1">
                           <a:solidFill>
-                            <a:srgbClr val="1F1F1F"/>
+                            <a:srgbClr val="FFFFFF"/>
                           </a:solidFill>
                           <a:latin typeface="Calibri"/>
                         </a:rPr>
@@ -19881,7 +18935,7 @@
                   </a:txBody>
                   <a:tcPr marL="91440" marR="91440" marT="41148" marB="41148" anchor="ctr">
                     <a:solidFill>
-                      <a:srgbClr val="EC7000"/>
+                      <a:srgbClr val="FF6200"/>
                     </a:solidFill>
                     <a:lnL>
                       <a:noFill/>
@@ -19920,7 +18974,7 @@
                       <a:r>
                         <a:rPr sz="1300" b="1">
                           <a:solidFill>
-                            <a:srgbClr val="1F1F1F"/>
+                            <a:srgbClr val="FFFFFF"/>
                           </a:solidFill>
                           <a:latin typeface="Calibri"/>
                         </a:rPr>
@@ -19930,7 +18984,7 @@
                   </a:txBody>
                   <a:tcPr marL="91440" marR="91440" marT="41148" marB="41148" anchor="ctr">
                     <a:solidFill>
-                      <a:srgbClr val="EC7000"/>
+                      <a:srgbClr val="FF6200"/>
                     </a:solidFill>
                     <a:lnL>
                       <a:noFill/>
@@ -19969,7 +19023,7 @@
                       <a:r>
                         <a:rPr sz="1300" b="1">
                           <a:solidFill>
-                            <a:srgbClr val="1F1F1F"/>
+                            <a:srgbClr val="FFFFFF"/>
                           </a:solidFill>
                           <a:latin typeface="Calibri"/>
                         </a:rPr>
@@ -19979,7 +19033,7 @@
                   </a:txBody>
                   <a:tcPr marL="91440" marR="91440" marT="41148" marB="41148" anchor="ctr">
                     <a:solidFill>
-                      <a:srgbClr val="EC7000"/>
+                      <a:srgbClr val="FF6200"/>
                     </a:solidFill>
                     <a:lnL>
                       <a:noFill/>
@@ -20018,7 +19072,7 @@
                       <a:r>
                         <a:rPr sz="1300" b="1">
                           <a:solidFill>
-                            <a:srgbClr val="1F1F1F"/>
+                            <a:srgbClr val="FFFFFF"/>
                           </a:solidFill>
                           <a:latin typeface="Calibri"/>
                         </a:rPr>
@@ -20028,7 +19082,7 @@
                   </a:txBody>
                   <a:tcPr marL="91440" marR="91440" marT="41148" marB="41148" anchor="ctr">
                     <a:solidFill>
-                      <a:srgbClr val="EC7000"/>
+                      <a:srgbClr val="FF6200"/>
                     </a:solidFill>
                     <a:lnL>
                       <a:noFill/>
@@ -20067,7 +19121,7 @@
                       <a:r>
                         <a:rPr sz="1300" b="1">
                           <a:solidFill>
-                            <a:srgbClr val="1F1F1F"/>
+                            <a:srgbClr val="FFFFFF"/>
                           </a:solidFill>
                           <a:latin typeface="Calibri"/>
                         </a:rPr>
@@ -20077,7 +19131,7 @@
                   </a:txBody>
                   <a:tcPr marL="91440" marR="91440" marT="41148" marB="41148" anchor="ctr">
                     <a:solidFill>
-                      <a:srgbClr val="EC7000"/>
+                      <a:srgbClr val="FF6200"/>
                     </a:solidFill>
                     <a:lnL>
                       <a:noFill/>
@@ -20238,29 +19292,7 @@
                           </a:solidFill>
                           <a:latin typeface="Calibri"/>
                         </a:rPr>
-                        <a:t>Não localizado no</a:t>
-                      </a:r>
-                    </a:p>
-                    <a:p>
-                      <a:pPr algn="ctr">
-                        <a:lnSpc>
-                          <a:spcPct val="100000"/>
-                        </a:lnSpc>
-                        <a:spcBef>
-                          <a:spcPts val="0"/>
-                        </a:spcBef>
-                        <a:spcAft>
-                          <a:spcPts val="0"/>
-                        </a:spcAft>
-                      </a:pPr>
-                      <a:r>
-                        <a:rPr sz="1300" b="0">
-                          <a:solidFill>
-                            <a:srgbClr val="1F1F1F"/>
-                          </a:solidFill>
-                          <a:latin typeface="Calibri"/>
-                        </a:rPr>
-                        <a:t>corpus acessível</a:t>
+                        <a:t>-</a:t>
                       </a:r>
                     </a:p>
                   </a:txBody>
@@ -20607,29 +19639,7 @@
                           </a:solidFill>
                           <a:latin typeface="Calibri"/>
                         </a:rPr>
-                        <a:t>Não localizado no</a:t>
-                      </a:r>
-                    </a:p>
-                    <a:p>
-                      <a:pPr algn="ctr">
-                        <a:lnSpc>
-                          <a:spcPct val="100000"/>
-                        </a:lnSpc>
-                        <a:spcBef>
-                          <a:spcPts val="0"/>
-                        </a:spcBef>
-                        <a:spcAft>
-                          <a:spcPts val="0"/>
-                        </a:spcAft>
-                      </a:pPr>
-                      <a:r>
-                        <a:rPr sz="1300" b="0">
-                          <a:solidFill>
-                            <a:srgbClr val="1F1F1F"/>
-                          </a:solidFill>
-                          <a:latin typeface="Calibri"/>
-                        </a:rPr>
-                        <a:t>corpus acessível</a:t>
+                        <a:t>-</a:t>
                       </a:r>
                     </a:p>
                   </a:txBody>
@@ -21020,29 +20030,7 @@
                           </a:solidFill>
                           <a:latin typeface="Calibri"/>
                         </a:rPr>
-                        <a:t>Não localizado no</a:t>
-                      </a:r>
-                    </a:p>
-                    <a:p>
-                      <a:pPr algn="ctr">
-                        <a:lnSpc>
-                          <a:spcPct val="100000"/>
-                        </a:lnSpc>
-                        <a:spcBef>
-                          <a:spcPts val="0"/>
-                        </a:spcBef>
-                        <a:spcAft>
-                          <a:spcPts val="0"/>
-                        </a:spcAft>
-                      </a:pPr>
-                      <a:r>
-                        <a:rPr sz="1300" b="0">
-                          <a:solidFill>
-                            <a:srgbClr val="1F1F1F"/>
-                          </a:solidFill>
-                          <a:latin typeface="Calibri"/>
-                        </a:rPr>
-                        <a:t>corpus acessível</a:t>
+                        <a:t>-</a:t>
                       </a:r>
                     </a:p>
                   </a:txBody>
@@ -21433,29 +20421,7 @@
                           </a:solidFill>
                           <a:latin typeface="Calibri"/>
                         </a:rPr>
-                        <a:t>Não localizado no</a:t>
-                      </a:r>
-                    </a:p>
-                    <a:p>
-                      <a:pPr algn="ctr">
-                        <a:lnSpc>
-                          <a:spcPct val="100000"/>
-                        </a:lnSpc>
-                        <a:spcBef>
-                          <a:spcPts val="0"/>
-                        </a:spcBef>
-                        <a:spcAft>
-                          <a:spcPts val="0"/>
-                        </a:spcAft>
-                      </a:pPr>
-                      <a:r>
-                        <a:rPr sz="1300" b="0">
-                          <a:solidFill>
-                            <a:srgbClr val="1F1F1F"/>
-                          </a:solidFill>
-                          <a:latin typeface="Calibri"/>
-                        </a:rPr>
-                        <a:t>corpus acessível</a:t>
+                        <a:t>-</a:t>
                       </a:r>
                     </a:p>
                   </a:txBody>
@@ -21502,29 +20468,7 @@
                           </a:solidFill>
                           <a:latin typeface="Calibri"/>
                         </a:rPr>
-                        <a:t>Não localizado no</a:t>
-                      </a:r>
-                    </a:p>
-                    <a:p>
-                      <a:pPr algn="ctr">
-                        <a:lnSpc>
-                          <a:spcPct val="100000"/>
-                        </a:lnSpc>
-                        <a:spcBef>
-                          <a:spcPts val="0"/>
-                        </a:spcBef>
-                        <a:spcAft>
-                          <a:spcPts val="0"/>
-                        </a:spcAft>
-                      </a:pPr>
-                      <a:r>
-                        <a:rPr sz="1300" b="0">
-                          <a:solidFill>
-                            <a:srgbClr val="1F1F1F"/>
-                          </a:solidFill>
-                          <a:latin typeface="Calibri"/>
-                        </a:rPr>
-                        <a:t>corpus acessível</a:t>
+                        <a:t>-</a:t>
                       </a:r>
                     </a:p>
                   </a:txBody>
@@ -21571,29 +20515,7 @@
                           </a:solidFill>
                           <a:latin typeface="Calibri"/>
                         </a:rPr>
-                        <a:t>Não localizado no</a:t>
-                      </a:r>
-                    </a:p>
-                    <a:p>
-                      <a:pPr algn="ctr">
-                        <a:lnSpc>
-                          <a:spcPct val="100000"/>
-                        </a:lnSpc>
-                        <a:spcBef>
-                          <a:spcPts val="0"/>
-                        </a:spcBef>
-                        <a:spcAft>
-                          <a:spcPts val="0"/>
-                        </a:spcAft>
-                      </a:pPr>
-                      <a:r>
-                        <a:rPr sz="1300" b="0">
-                          <a:solidFill>
-                            <a:srgbClr val="1F1F1F"/>
-                          </a:solidFill>
-                          <a:latin typeface="Calibri"/>
-                        </a:rPr>
-                        <a:t>corpus acessível</a:t>
+                        <a:t>-</a:t>
                       </a:r>
                     </a:p>
                   </a:txBody>
@@ -21616,7 +20538,7 @@
                   </a:tcPr>
                 </a:tc>
               </a:tr>
-              <a:tr h="470916">
+              <a:tr h="283464">
                 <a:tc>
                   <a:txBody>
                     <a:bodyPr wrap="square">
@@ -21691,29 +20613,7 @@
                           </a:solidFill>
                           <a:latin typeface="Calibri"/>
                         </a:rPr>
-                        <a:t>Não localizado no</a:t>
-                      </a:r>
-                    </a:p>
-                    <a:p>
-                      <a:pPr algn="ctr">
-                        <a:lnSpc>
-                          <a:spcPct val="100000"/>
-                        </a:lnSpc>
-                        <a:spcBef>
-                          <a:spcPts val="0"/>
-                        </a:spcBef>
-                        <a:spcAft>
-                          <a:spcPts val="0"/>
-                        </a:spcAft>
-                      </a:pPr>
-                      <a:r>
-                        <a:rPr sz="1300" b="0">
-                          <a:solidFill>
-                            <a:srgbClr val="1F1F1F"/>
-                          </a:solidFill>
-                          <a:latin typeface="Calibri"/>
-                        </a:rPr>
-                        <a:t>corpus acessível</a:t>
+                        <a:t>-</a:t>
                       </a:r>
                     </a:p>
                   </a:txBody>
@@ -21762,29 +20662,7 @@
                           </a:solidFill>
                           <a:latin typeface="Calibri"/>
                         </a:rPr>
-                        <a:t>Não localizado no</a:t>
-                      </a:r>
-                    </a:p>
-                    <a:p>
-                      <a:pPr algn="ctr">
-                        <a:lnSpc>
-                          <a:spcPct val="100000"/>
-                        </a:lnSpc>
-                        <a:spcBef>
-                          <a:spcPts val="0"/>
-                        </a:spcBef>
-                        <a:spcAft>
-                          <a:spcPts val="0"/>
-                        </a:spcAft>
-                      </a:pPr>
-                      <a:r>
-                        <a:rPr sz="1300" b="0">
-                          <a:solidFill>
-                            <a:srgbClr val="1F1F1F"/>
-                          </a:solidFill>
-                          <a:latin typeface="Calibri"/>
-                        </a:rPr>
-                        <a:t>corpus acessível</a:t>
+                        <a:t>-</a:t>
                       </a:r>
                     </a:p>
                   </a:txBody>
@@ -21833,29 +20711,7 @@
                           </a:solidFill>
                           <a:latin typeface="Calibri"/>
                         </a:rPr>
-                        <a:t>Não localizado no</a:t>
-                      </a:r>
-                    </a:p>
-                    <a:p>
-                      <a:pPr algn="ctr">
-                        <a:lnSpc>
-                          <a:spcPct val="100000"/>
-                        </a:lnSpc>
-                        <a:spcBef>
-                          <a:spcPts val="0"/>
-                        </a:spcBef>
-                        <a:spcAft>
-                          <a:spcPts val="0"/>
-                        </a:spcAft>
-                      </a:pPr>
-                      <a:r>
-                        <a:rPr sz="1300" b="0">
-                          <a:solidFill>
-                            <a:srgbClr val="1F1F1F"/>
-                          </a:solidFill>
-                          <a:latin typeface="Calibri"/>
-                        </a:rPr>
-                        <a:t>corpus acessível</a:t>
+                        <a:t>-</a:t>
                       </a:r>
                     </a:p>
                   </a:txBody>
@@ -21904,29 +20760,7 @@
                           </a:solidFill>
                           <a:latin typeface="Calibri"/>
                         </a:rPr>
-                        <a:t>Não localizado no</a:t>
-                      </a:r>
-                    </a:p>
-                    <a:p>
-                      <a:pPr algn="ctr">
-                        <a:lnSpc>
-                          <a:spcPct val="100000"/>
-                        </a:lnSpc>
-                        <a:spcBef>
-                          <a:spcPts val="0"/>
-                        </a:spcBef>
-                        <a:spcAft>
-                          <a:spcPts val="0"/>
-                        </a:spcAft>
-                      </a:pPr>
-                      <a:r>
-                        <a:rPr sz="1300" b="0">
-                          <a:solidFill>
-                            <a:srgbClr val="1F1F1F"/>
-                          </a:solidFill>
-                          <a:latin typeface="Calibri"/>
-                        </a:rPr>
-                        <a:t>corpus acessível</a:t>
+                        <a:t>-</a:t>
                       </a:r>
                     </a:p>
                   </a:txBody>
@@ -22096,7 +20930,7 @@
         </p:nvGraphicFramePr>
         <p:xfrm>
           <a:off x="438912" y="932688"/>
-          <a:ext cx="11313870" cy="3310128"/>
+          <a:ext cx="11313870" cy="3122676"/>
         </p:xfrm>
         <a:graphic>
           <a:graphicData uri="http://schemas.openxmlformats.org/drawingml/2006/table">
@@ -22132,7 +20966,7 @@
                       <a:r>
                         <a:rPr sz="1300" b="1">
                           <a:solidFill>
-                            <a:srgbClr val="1F1F1F"/>
+                            <a:srgbClr val="FFFFFF"/>
                           </a:solidFill>
                           <a:latin typeface="Calibri"/>
                         </a:rPr>
@@ -22142,7 +20976,7 @@
                   </a:txBody>
                   <a:tcPr marL="91440" marR="91440" marT="41148" marB="41148" anchor="ctr">
                     <a:solidFill>
-                      <a:srgbClr val="EC7000"/>
+                      <a:srgbClr val="FF6200"/>
                     </a:solidFill>
                     <a:lnL>
                       <a:noFill/>
@@ -22181,7 +21015,7 @@
                       <a:r>
                         <a:rPr sz="1300" b="1">
                           <a:solidFill>
-                            <a:srgbClr val="1F1F1F"/>
+                            <a:srgbClr val="FFFFFF"/>
                           </a:solidFill>
                           <a:latin typeface="Calibri"/>
                         </a:rPr>
@@ -22191,7 +21025,7 @@
                   </a:txBody>
                   <a:tcPr marL="91440" marR="91440" marT="41148" marB="41148" anchor="ctr">
                     <a:solidFill>
-                      <a:srgbClr val="EC7000"/>
+                      <a:srgbClr val="FF6200"/>
                     </a:solidFill>
                     <a:lnL>
                       <a:noFill/>
@@ -22230,7 +21064,7 @@
                       <a:r>
                         <a:rPr sz="1300" b="1">
                           <a:solidFill>
-                            <a:srgbClr val="1F1F1F"/>
+                            <a:srgbClr val="FFFFFF"/>
                           </a:solidFill>
                           <a:latin typeface="Calibri"/>
                         </a:rPr>
@@ -22240,7 +21074,7 @@
                   </a:txBody>
                   <a:tcPr marL="91440" marR="91440" marT="41148" marB="41148" anchor="ctr">
                     <a:solidFill>
-                      <a:srgbClr val="EC7000"/>
+                      <a:srgbClr val="FF6200"/>
                     </a:solidFill>
                     <a:lnL>
                       <a:noFill/>
@@ -22279,7 +21113,7 @@
                       <a:r>
                         <a:rPr sz="1300" b="1">
                           <a:solidFill>
-                            <a:srgbClr val="1F1F1F"/>
+                            <a:srgbClr val="FFFFFF"/>
                           </a:solidFill>
                           <a:latin typeface="Calibri"/>
                         </a:rPr>
@@ -22289,7 +21123,7 @@
                   </a:txBody>
                   <a:tcPr marL="91440" marR="91440" marT="41148" marB="41148" anchor="ctr">
                     <a:solidFill>
-                      <a:srgbClr val="EC7000"/>
+                      <a:srgbClr val="FF6200"/>
                     </a:solidFill>
                     <a:lnL>
                       <a:noFill/>
@@ -22519,29 +21353,7 @@
                           </a:solidFill>
                           <a:latin typeface="Calibri"/>
                         </a:rPr>
-                        <a:t>Não localizado no corpus</a:t>
-                      </a:r>
-                    </a:p>
-                    <a:p>
-                      <a:pPr algn="ctr">
-                        <a:lnSpc>
-                          <a:spcPct val="100000"/>
-                        </a:lnSpc>
-                        <a:spcBef>
-                          <a:spcPts val="0"/>
-                        </a:spcBef>
-                        <a:spcAft>
-                          <a:spcPts val="0"/>
-                        </a:spcAft>
-                      </a:pPr>
-                      <a:r>
-                        <a:rPr sz="1300" b="0">
-                          <a:solidFill>
-                            <a:srgbClr val="1F1F1F"/>
-                          </a:solidFill>
-                          <a:latin typeface="Calibri"/>
-                        </a:rPr>
-                        <a:t>acessível</a:t>
+                        <a:t>-</a:t>
                       </a:r>
                     </a:p>
                   </a:txBody>
@@ -22750,29 +21562,7 @@
                           </a:solidFill>
                           <a:latin typeface="Calibri"/>
                         </a:rPr>
-                        <a:t>Não localizado no corpus</a:t>
-                      </a:r>
-                    </a:p>
-                    <a:p>
-                      <a:pPr algn="ctr">
-                        <a:lnSpc>
-                          <a:spcPct val="100000"/>
-                        </a:lnSpc>
-                        <a:spcBef>
-                          <a:spcPts val="0"/>
-                        </a:spcBef>
-                        <a:spcAft>
-                          <a:spcPts val="0"/>
-                        </a:spcAft>
-                      </a:pPr>
-                      <a:r>
-                        <a:rPr sz="1300" b="0">
-                          <a:solidFill>
-                            <a:srgbClr val="1F1F1F"/>
-                          </a:solidFill>
-                          <a:latin typeface="Calibri"/>
-                        </a:rPr>
-                        <a:t>acessível</a:t>
+                        <a:t>-</a:t>
                       </a:r>
                     </a:p>
                   </a:txBody>
@@ -22819,29 +21609,7 @@
                           </a:solidFill>
                           <a:latin typeface="Calibri"/>
                         </a:rPr>
-                        <a:t>Não localizado no corpus</a:t>
-                      </a:r>
-                    </a:p>
-                    <a:p>
-                      <a:pPr algn="ctr">
-                        <a:lnSpc>
-                          <a:spcPct val="100000"/>
-                        </a:lnSpc>
-                        <a:spcBef>
-                          <a:spcPts val="0"/>
-                        </a:spcBef>
-                        <a:spcAft>
-                          <a:spcPts val="0"/>
-                        </a:spcAft>
-                      </a:pPr>
-                      <a:r>
-                        <a:rPr sz="1300" b="0">
-                          <a:solidFill>
-                            <a:srgbClr val="1F1F1F"/>
-                          </a:solidFill>
-                          <a:latin typeface="Calibri"/>
-                        </a:rPr>
-                        <a:t>acessível</a:t>
+                        <a:t>-</a:t>
                       </a:r>
                     </a:p>
                   </a:txBody>
@@ -23097,29 +21865,7 @@
                           </a:solidFill>
                           <a:latin typeface="Calibri"/>
                         </a:rPr>
-                        <a:t>Não localizado no corpus</a:t>
-                      </a:r>
-                    </a:p>
-                    <a:p>
-                      <a:pPr algn="ctr">
-                        <a:lnSpc>
-                          <a:spcPct val="100000"/>
-                        </a:lnSpc>
-                        <a:spcBef>
-                          <a:spcPts val="0"/>
-                        </a:spcBef>
-                        <a:spcAft>
-                          <a:spcPts val="0"/>
-                        </a:spcAft>
-                      </a:pPr>
-                      <a:r>
-                        <a:rPr sz="1300" b="0">
-                          <a:solidFill>
-                            <a:srgbClr val="1F1F1F"/>
-                          </a:solidFill>
-                          <a:latin typeface="Calibri"/>
-                        </a:rPr>
-                        <a:t>acessível</a:t>
+                        <a:t>-</a:t>
                       </a:r>
                     </a:p>
                   </a:txBody>
@@ -23215,29 +21961,7 @@
                           </a:solidFill>
                           <a:latin typeface="Calibri"/>
                         </a:rPr>
-                        <a:t>Não localizado no corpus</a:t>
-                      </a:r>
-                    </a:p>
-                    <a:p>
-                      <a:pPr algn="ctr">
-                        <a:lnSpc>
-                          <a:spcPct val="100000"/>
-                        </a:lnSpc>
-                        <a:spcBef>
-                          <a:spcPts val="0"/>
-                        </a:spcBef>
-                        <a:spcAft>
-                          <a:spcPts val="0"/>
-                        </a:spcAft>
-                      </a:pPr>
-                      <a:r>
-                        <a:rPr sz="1300" b="0">
-                          <a:solidFill>
-                            <a:srgbClr val="1F1F1F"/>
-                          </a:solidFill>
-                          <a:latin typeface="Calibri"/>
-                        </a:rPr>
-                        <a:t>acessível</a:t>
+                        <a:t>-</a:t>
                       </a:r>
                     </a:p>
                   </a:txBody>
@@ -23375,29 +22099,7 @@
                           </a:solidFill>
                           <a:latin typeface="Calibri"/>
                         </a:rPr>
-                        <a:t>Não localizado no corpus</a:t>
-                      </a:r>
-                    </a:p>
-                    <a:p>
-                      <a:pPr algn="ctr">
-                        <a:lnSpc>
-                          <a:spcPct val="100000"/>
-                        </a:lnSpc>
-                        <a:spcBef>
-                          <a:spcPts val="0"/>
-                        </a:spcBef>
-                        <a:spcAft>
-                          <a:spcPts val="0"/>
-                        </a:spcAft>
-                      </a:pPr>
-                      <a:r>
-                        <a:rPr sz="1300" b="0">
-                          <a:solidFill>
-                            <a:srgbClr val="1F1F1F"/>
-                          </a:solidFill>
-                          <a:latin typeface="Calibri"/>
-                        </a:rPr>
-                        <a:t>acessível</a:t>
+                        <a:t>-</a:t>
                       </a:r>
                     </a:p>
                   </a:txBody>
@@ -23420,7 +22122,7 @@
                   </a:tcPr>
                 </a:tc>
               </a:tr>
-              <a:tr h="470916">
+              <a:tr h="283464">
                 <a:tc>
                   <a:txBody>
                     <a:bodyPr wrap="square">
@@ -23495,29 +22197,7 @@
                           </a:solidFill>
                           <a:latin typeface="Calibri"/>
                         </a:rPr>
-                        <a:t>Não localizado no corpus</a:t>
-                      </a:r>
-                    </a:p>
-                    <a:p>
-                      <a:pPr algn="ctr">
-                        <a:lnSpc>
-                          <a:spcPct val="100000"/>
-                        </a:lnSpc>
-                        <a:spcBef>
-                          <a:spcPts val="0"/>
-                        </a:spcBef>
-                        <a:spcAft>
-                          <a:spcPts val="0"/>
-                        </a:spcAft>
-                      </a:pPr>
-                      <a:r>
-                        <a:rPr sz="1300" b="0">
-                          <a:solidFill>
-                            <a:srgbClr val="1F1F1F"/>
-                          </a:solidFill>
-                          <a:latin typeface="Calibri"/>
-                        </a:rPr>
-                        <a:t>acessível</a:t>
+                        <a:t>-</a:t>
                       </a:r>
                     </a:p>
                   </a:txBody>
@@ -23566,29 +22246,7 @@
                           </a:solidFill>
                           <a:latin typeface="Calibri"/>
                         </a:rPr>
-                        <a:t>Não localizado no corpus</a:t>
-                      </a:r>
-                    </a:p>
-                    <a:p>
-                      <a:pPr algn="ctr">
-                        <a:lnSpc>
-                          <a:spcPct val="100000"/>
-                        </a:lnSpc>
-                        <a:spcBef>
-                          <a:spcPts val="0"/>
-                        </a:spcBef>
-                        <a:spcAft>
-                          <a:spcPts val="0"/>
-                        </a:spcAft>
-                      </a:pPr>
-                      <a:r>
-                        <a:rPr sz="1300" b="0">
-                          <a:solidFill>
-                            <a:srgbClr val="1F1F1F"/>
-                          </a:solidFill>
-                          <a:latin typeface="Calibri"/>
-                        </a:rPr>
-                        <a:t>acessível</a:t>
+                        <a:t>-</a:t>
                       </a:r>
                     </a:p>
                   </a:txBody>
@@ -23637,29 +22295,7 @@
                           </a:solidFill>
                           <a:latin typeface="Calibri"/>
                         </a:rPr>
-                        <a:t>Não localizado no corpus</a:t>
-                      </a:r>
-                    </a:p>
-                    <a:p>
-                      <a:pPr algn="ctr">
-                        <a:lnSpc>
-                          <a:spcPct val="100000"/>
-                        </a:lnSpc>
-                        <a:spcBef>
-                          <a:spcPts val="0"/>
-                        </a:spcBef>
-                        <a:spcAft>
-                          <a:spcPts val="0"/>
-                        </a:spcAft>
-                      </a:pPr>
-                      <a:r>
-                        <a:rPr sz="1300" b="0">
-                          <a:solidFill>
-                            <a:srgbClr val="1F1F1F"/>
-                          </a:solidFill>
-                          <a:latin typeface="Calibri"/>
-                        </a:rPr>
-                        <a:t>acessível</a:t>
+                        <a:t>-</a:t>
                       </a:r>
                     </a:p>
                   </a:txBody>
@@ -23866,7 +22502,7 @@
                       <a:r>
                         <a:rPr sz="1300" b="1">
                           <a:solidFill>
-                            <a:srgbClr val="1F1F1F"/>
+                            <a:srgbClr val="FFFFFF"/>
                           </a:solidFill>
                           <a:latin typeface="Calibri"/>
                         </a:rPr>
@@ -23876,7 +22512,7 @@
                   </a:txBody>
                   <a:tcPr marL="91440" marR="91440" marT="41148" marB="41148" anchor="ctr">
                     <a:solidFill>
-                      <a:srgbClr val="EC7000"/>
+                      <a:srgbClr val="FF6200"/>
                     </a:solidFill>
                     <a:lnL>
                       <a:noFill/>
@@ -23915,7 +22551,7 @@
                       <a:r>
                         <a:rPr sz="1300" b="1">
                           <a:solidFill>
-                            <a:srgbClr val="1F1F1F"/>
+                            <a:srgbClr val="FFFFFF"/>
                           </a:solidFill>
                           <a:latin typeface="Calibri"/>
                         </a:rPr>
@@ -23925,7 +22561,7 @@
                   </a:txBody>
                   <a:tcPr marL="91440" marR="91440" marT="41148" marB="41148" anchor="ctr">
                     <a:solidFill>
-                      <a:srgbClr val="EC7000"/>
+                      <a:srgbClr val="FF6200"/>
                     </a:solidFill>
                     <a:lnL>
                       <a:noFill/>
@@ -23964,7 +22600,7 @@
                       <a:r>
                         <a:rPr sz="1300" b="1">
                           <a:solidFill>
-                            <a:srgbClr val="1F1F1F"/>
+                            <a:srgbClr val="FFFFFF"/>
                           </a:solidFill>
                           <a:latin typeface="Calibri"/>
                         </a:rPr>
@@ -23974,7 +22610,7 @@
                   </a:txBody>
                   <a:tcPr marL="91440" marR="91440" marT="41148" marB="41148" anchor="ctr">
                     <a:solidFill>
-                      <a:srgbClr val="EC7000"/>
+                      <a:srgbClr val="FF6200"/>
                     </a:solidFill>
                     <a:lnL>
                       <a:noFill/>
@@ -24013,7 +22649,7 @@
                       <a:r>
                         <a:rPr sz="1300" b="1">
                           <a:solidFill>
-                            <a:srgbClr val="1F1F1F"/>
+                            <a:srgbClr val="FFFFFF"/>
                           </a:solidFill>
                           <a:latin typeface="Calibri"/>
                         </a:rPr>
@@ -24023,7 +22659,7 @@
                   </a:txBody>
                   <a:tcPr marL="91440" marR="91440" marT="41148" marB="41148" anchor="ctr">
                     <a:solidFill>
-                      <a:srgbClr val="EC7000"/>
+                      <a:srgbClr val="FF6200"/>
                     </a:solidFill>
                     <a:lnL>
                       <a:noFill/>
@@ -24062,7 +22698,7 @@
                       <a:r>
                         <a:rPr sz="1300" b="1">
                           <a:solidFill>
-                            <a:srgbClr val="1F1F1F"/>
+                            <a:srgbClr val="FFFFFF"/>
                           </a:solidFill>
                           <a:latin typeface="Calibri"/>
                         </a:rPr>
@@ -24072,7 +22708,7 @@
                   </a:txBody>
                   <a:tcPr marL="91440" marR="91440" marT="41148" marB="41148" anchor="ctr">
                     <a:solidFill>
-                      <a:srgbClr val="EC7000"/>
+                      <a:srgbClr val="FF6200"/>
                     </a:solidFill>
                     <a:lnL>
                       <a:noFill/>
@@ -24255,29 +22891,7 @@
                           </a:solidFill>
                           <a:latin typeface="Calibri"/>
                         </a:rPr>
-                        <a:t>Não localizado no</a:t>
-                      </a:r>
-                    </a:p>
-                    <a:p>
-                      <a:pPr algn="ctr">
-                        <a:lnSpc>
-                          <a:spcPct val="100000"/>
-                        </a:lnSpc>
-                        <a:spcBef>
-                          <a:spcPts val="0"/>
-                        </a:spcBef>
-                        <a:spcAft>
-                          <a:spcPts val="0"/>
-                        </a:spcAft>
-                      </a:pPr>
-                      <a:r>
-                        <a:rPr sz="1300" b="0">
-                          <a:solidFill>
-                            <a:srgbClr val="1F1F1F"/>
-                          </a:solidFill>
-                          <a:latin typeface="Calibri"/>
-                        </a:rPr>
-                        <a:t>corpus acessível</a:t>
+                        <a:t>-</a:t>
                       </a:r>
                     </a:p>
                   </a:txBody>
@@ -24324,29 +22938,7 @@
                           </a:solidFill>
                           <a:latin typeface="Calibri"/>
                         </a:rPr>
-                        <a:t>Não localizado no</a:t>
-                      </a:r>
-                    </a:p>
-                    <a:p>
-                      <a:pPr algn="ctr">
-                        <a:lnSpc>
-                          <a:spcPct val="100000"/>
-                        </a:lnSpc>
-                        <a:spcBef>
-                          <a:spcPts val="0"/>
-                        </a:spcBef>
-                        <a:spcAft>
-                          <a:spcPts val="0"/>
-                        </a:spcAft>
-                      </a:pPr>
-                      <a:r>
-                        <a:rPr sz="1300" b="0">
-                          <a:solidFill>
-                            <a:srgbClr val="1F1F1F"/>
-                          </a:solidFill>
-                          <a:latin typeface="Calibri"/>
-                        </a:rPr>
-                        <a:t>corpus acessível</a:t>
+                        <a:t>-</a:t>
                       </a:r>
                     </a:p>
                   </a:txBody>
@@ -24393,29 +22985,7 @@
                           </a:solidFill>
                           <a:latin typeface="Calibri"/>
                         </a:rPr>
-                        <a:t>Não localizado no</a:t>
-                      </a:r>
-                    </a:p>
-                    <a:p>
-                      <a:pPr algn="ctr">
-                        <a:lnSpc>
-                          <a:spcPct val="100000"/>
-                        </a:lnSpc>
-                        <a:spcBef>
-                          <a:spcPts val="0"/>
-                        </a:spcBef>
-                        <a:spcAft>
-                          <a:spcPts val="0"/>
-                        </a:spcAft>
-                      </a:pPr>
-                      <a:r>
-                        <a:rPr sz="1300" b="0">
-                          <a:solidFill>
-                            <a:srgbClr val="1F1F1F"/>
-                          </a:solidFill>
-                          <a:latin typeface="Calibri"/>
-                        </a:rPr>
-                        <a:t>corpus acessível</a:t>
+                        <a:t>-</a:t>
                       </a:r>
                     </a:p>
                   </a:txBody>
@@ -24511,29 +23081,7 @@
                           </a:solidFill>
                           <a:latin typeface="Calibri"/>
                         </a:rPr>
-                        <a:t>Não localizado no</a:t>
-                      </a:r>
-                    </a:p>
-                    <a:p>
-                      <a:pPr algn="ctr">
-                        <a:lnSpc>
-                          <a:spcPct val="100000"/>
-                        </a:lnSpc>
-                        <a:spcBef>
-                          <a:spcPts val="0"/>
-                        </a:spcBef>
-                        <a:spcAft>
-                          <a:spcPts val="0"/>
-                        </a:spcAft>
-                      </a:pPr>
-                      <a:r>
-                        <a:rPr sz="1300" b="0">
-                          <a:solidFill>
-                            <a:srgbClr val="1F1F1F"/>
-                          </a:solidFill>
-                          <a:latin typeface="Calibri"/>
-                        </a:rPr>
-                        <a:t>corpus acessível</a:t>
+                        <a:t>-</a:t>
                       </a:r>
                     </a:p>
                   </a:txBody>
@@ -24580,29 +23128,7 @@
                           </a:solidFill>
                           <a:latin typeface="Calibri"/>
                         </a:rPr>
-                        <a:t>Não localizado no</a:t>
-                      </a:r>
-                    </a:p>
-                    <a:p>
-                      <a:pPr algn="ctr">
-                        <a:lnSpc>
-                          <a:spcPct val="100000"/>
-                        </a:lnSpc>
-                        <a:spcBef>
-                          <a:spcPts val="0"/>
-                        </a:spcBef>
-                        <a:spcAft>
-                          <a:spcPts val="0"/>
-                        </a:spcAft>
-                      </a:pPr>
-                      <a:r>
-                        <a:rPr sz="1300" b="0">
-                          <a:solidFill>
-                            <a:srgbClr val="1F1F1F"/>
-                          </a:solidFill>
-                          <a:latin typeface="Calibri"/>
-                        </a:rPr>
-                        <a:t>corpus acessível</a:t>
+                        <a:t>-</a:t>
                       </a:r>
                     </a:p>
                   </a:txBody>
@@ -24718,29 +23244,7 @@
                           </a:solidFill>
                           <a:latin typeface="Calibri"/>
                         </a:rPr>
-                        <a:t>Não localizado no</a:t>
-                      </a:r>
-                    </a:p>
-                    <a:p>
-                      <a:pPr algn="ctr">
-                        <a:lnSpc>
-                          <a:spcPct val="100000"/>
-                        </a:lnSpc>
-                        <a:spcBef>
-                          <a:spcPts val="0"/>
-                        </a:spcBef>
-                        <a:spcAft>
-                          <a:spcPts val="0"/>
-                        </a:spcAft>
-                      </a:pPr>
-                      <a:r>
-                        <a:rPr sz="1300" b="0">
-                          <a:solidFill>
-                            <a:srgbClr val="1F1F1F"/>
-                          </a:solidFill>
-                          <a:latin typeface="Calibri"/>
-                        </a:rPr>
-                        <a:t>corpus acessível</a:t>
+                        <a:t>-</a:t>
                       </a:r>
                     </a:p>
                   </a:txBody>
@@ -24927,29 +23431,7 @@
                           </a:solidFill>
                           <a:latin typeface="Calibri"/>
                         </a:rPr>
-                        <a:t>Não localizado no</a:t>
-                      </a:r>
-                    </a:p>
-                    <a:p>
-                      <a:pPr algn="ctr">
-                        <a:lnSpc>
-                          <a:spcPct val="100000"/>
-                        </a:lnSpc>
-                        <a:spcBef>
-                          <a:spcPts val="0"/>
-                        </a:spcBef>
-                        <a:spcAft>
-                          <a:spcPts val="0"/>
-                        </a:spcAft>
-                      </a:pPr>
-                      <a:r>
-                        <a:rPr sz="1300" b="0">
-                          <a:solidFill>
-                            <a:srgbClr val="1F1F1F"/>
-                          </a:solidFill>
-                          <a:latin typeface="Calibri"/>
-                        </a:rPr>
-                        <a:t>corpus acessível</a:t>
+                        <a:t>-</a:t>
                       </a:r>
                     </a:p>
                   </a:txBody>
@@ -24996,29 +23478,7 @@
                           </a:solidFill>
                           <a:latin typeface="Calibri"/>
                         </a:rPr>
-                        <a:t>Não localizado no</a:t>
-                      </a:r>
-                    </a:p>
-                    <a:p>
-                      <a:pPr algn="ctr">
-                        <a:lnSpc>
-                          <a:spcPct val="100000"/>
-                        </a:lnSpc>
-                        <a:spcBef>
-                          <a:spcPts val="0"/>
-                        </a:spcBef>
-                        <a:spcAft>
-                          <a:spcPts val="0"/>
-                        </a:spcAft>
-                      </a:pPr>
-                      <a:r>
-                        <a:rPr sz="1300" b="0">
-                          <a:solidFill>
-                            <a:srgbClr val="1F1F1F"/>
-                          </a:solidFill>
-                          <a:latin typeface="Calibri"/>
-                        </a:rPr>
-                        <a:t>corpus acessível</a:t>
+                        <a:t>-</a:t>
                       </a:r>
                     </a:p>
                   </a:txBody>
@@ -25065,29 +23525,7 @@
                           </a:solidFill>
                           <a:latin typeface="Calibri"/>
                         </a:rPr>
-                        <a:t>Não localizado no</a:t>
-                      </a:r>
-                    </a:p>
-                    <a:p>
-                      <a:pPr algn="ctr">
-                        <a:lnSpc>
-                          <a:spcPct val="100000"/>
-                        </a:lnSpc>
-                        <a:spcBef>
-                          <a:spcPts val="0"/>
-                        </a:spcBef>
-                        <a:spcAft>
-                          <a:spcPts val="0"/>
-                        </a:spcAft>
-                      </a:pPr>
-                      <a:r>
-                        <a:rPr sz="1300" b="0">
-                          <a:solidFill>
-                            <a:srgbClr val="1F1F1F"/>
-                          </a:solidFill>
-                          <a:latin typeface="Calibri"/>
-                        </a:rPr>
-                        <a:t>corpus acessível</a:t>
+                        <a:t>-</a:t>
                       </a:r>
                     </a:p>
                   </a:txBody>
@@ -25318,29 +23756,7 @@
                           </a:solidFill>
                           <a:latin typeface="Calibri"/>
                         </a:rPr>
-                        <a:t>Não localizado no</a:t>
-                      </a:r>
-                    </a:p>
-                    <a:p>
-                      <a:pPr algn="ctr">
-                        <a:lnSpc>
-                          <a:spcPct val="100000"/>
-                        </a:lnSpc>
-                        <a:spcBef>
-                          <a:spcPts val="0"/>
-                        </a:spcBef>
-                        <a:spcAft>
-                          <a:spcPts val="0"/>
-                        </a:spcAft>
-                      </a:pPr>
-                      <a:r>
-                        <a:rPr sz="1300" b="0">
-                          <a:solidFill>
-                            <a:srgbClr val="1F1F1F"/>
-                          </a:solidFill>
-                          <a:latin typeface="Calibri"/>
-                        </a:rPr>
-                        <a:t>corpus acessível</a:t>
+                        <a:t>-</a:t>
                       </a:r>
                     </a:p>
                   </a:txBody>
@@ -25753,29 +24169,7 @@
                           </a:solidFill>
                           <a:latin typeface="Calibri"/>
                         </a:rPr>
-                        <a:t>Não localizado no</a:t>
-                      </a:r>
-                    </a:p>
-                    <a:p>
-                      <a:pPr algn="ctr">
-                        <a:lnSpc>
-                          <a:spcPct val="100000"/>
-                        </a:lnSpc>
-                        <a:spcBef>
-                          <a:spcPts val="0"/>
-                        </a:spcBef>
-                        <a:spcAft>
-                          <a:spcPts val="0"/>
-                        </a:spcAft>
-                      </a:pPr>
-                      <a:r>
-                        <a:rPr sz="1300" b="0">
-                          <a:solidFill>
-                            <a:srgbClr val="1F1F1F"/>
-                          </a:solidFill>
-                          <a:latin typeface="Calibri"/>
-                        </a:rPr>
-                        <a:t>corpus acessível</a:t>
+                        <a:t>-</a:t>
                       </a:r>
                     </a:p>
                   </a:txBody>
@@ -25913,29 +24307,7 @@
                           </a:solidFill>
                           <a:latin typeface="Calibri"/>
                         </a:rPr>
-                        <a:t>Não localizado no</a:t>
-                      </a:r>
-                    </a:p>
-                    <a:p>
-                      <a:pPr algn="ctr">
-                        <a:lnSpc>
-                          <a:spcPct val="100000"/>
-                        </a:lnSpc>
-                        <a:spcBef>
-                          <a:spcPts val="0"/>
-                        </a:spcBef>
-                        <a:spcAft>
-                          <a:spcPts val="0"/>
-                        </a:spcAft>
-                      </a:pPr>
-                      <a:r>
-                        <a:rPr sz="1300" b="0">
-                          <a:solidFill>
-                            <a:srgbClr val="1F1F1F"/>
-                          </a:solidFill>
-                          <a:latin typeface="Calibri"/>
-                        </a:rPr>
-                        <a:t>corpus acessível</a:t>
+                        <a:t>-</a:t>
                       </a:r>
                     </a:p>
                   </a:txBody>
@@ -26126,29 +24498,7 @@
                           </a:solidFill>
                           <a:latin typeface="Calibri"/>
                         </a:rPr>
-                        <a:t>Não localizado no</a:t>
-                      </a:r>
-                    </a:p>
-                    <a:p>
-                      <a:pPr algn="ctr">
-                        <a:lnSpc>
-                          <a:spcPct val="100000"/>
-                        </a:lnSpc>
-                        <a:spcBef>
-                          <a:spcPts val="0"/>
-                        </a:spcBef>
-                        <a:spcAft>
-                          <a:spcPts val="0"/>
-                        </a:spcAft>
-                      </a:pPr>
-                      <a:r>
-                        <a:rPr sz="1300" b="0">
-                          <a:solidFill>
-                            <a:srgbClr val="1F1F1F"/>
-                          </a:solidFill>
-                          <a:latin typeface="Calibri"/>
-                        </a:rPr>
-                        <a:t>corpus acessível</a:t>
+                        <a:t>-</a:t>
                       </a:r>
                     </a:p>
                   </a:txBody>
@@ -26197,29 +24547,7 @@
                           </a:solidFill>
                           <a:latin typeface="Calibri"/>
                         </a:rPr>
-                        <a:t>Não localizado no</a:t>
-                      </a:r>
-                    </a:p>
-                    <a:p>
-                      <a:pPr algn="ctr">
-                        <a:lnSpc>
-                          <a:spcPct val="100000"/>
-                        </a:lnSpc>
-                        <a:spcBef>
-                          <a:spcPts val="0"/>
-                        </a:spcBef>
-                        <a:spcAft>
-                          <a:spcPts val="0"/>
-                        </a:spcAft>
-                      </a:pPr>
-                      <a:r>
-                        <a:rPr sz="1300" b="0">
-                          <a:solidFill>
-                            <a:srgbClr val="1F1F1F"/>
-                          </a:solidFill>
-                          <a:latin typeface="Calibri"/>
-                        </a:rPr>
-                        <a:t>corpus acessível</a:t>
+                        <a:t>-</a:t>
                       </a:r>
                     </a:p>
                   </a:txBody>
@@ -26482,7 +24810,7 @@
         </p:nvGraphicFramePr>
         <p:xfrm>
           <a:off x="438912" y="932688"/>
-          <a:ext cx="11313870" cy="3781044"/>
+          <a:ext cx="11313870" cy="3406140"/>
         </p:xfrm>
         <a:graphic>
           <a:graphicData uri="http://schemas.openxmlformats.org/drawingml/2006/table">
@@ -26518,7 +24846,7 @@
                       <a:r>
                         <a:rPr sz="1300" b="1">
                           <a:solidFill>
-                            <a:srgbClr val="1F1F1F"/>
+                            <a:srgbClr val="FFFFFF"/>
                           </a:solidFill>
                           <a:latin typeface="Calibri"/>
                         </a:rPr>
@@ -26528,7 +24856,7 @@
                   </a:txBody>
                   <a:tcPr marL="91440" marR="91440" marT="41148" marB="41148" anchor="ctr">
                     <a:solidFill>
-                      <a:srgbClr val="EC7000"/>
+                      <a:srgbClr val="FF6200"/>
                     </a:solidFill>
                     <a:lnL>
                       <a:noFill/>
@@ -26567,7 +24895,7 @@
                       <a:r>
                         <a:rPr sz="1300" b="1">
                           <a:solidFill>
-                            <a:srgbClr val="1F1F1F"/>
+                            <a:srgbClr val="FFFFFF"/>
                           </a:solidFill>
                           <a:latin typeface="Calibri"/>
                         </a:rPr>
@@ -26577,7 +24905,7 @@
                   </a:txBody>
                   <a:tcPr marL="91440" marR="91440" marT="41148" marB="41148" anchor="ctr">
                     <a:solidFill>
-                      <a:srgbClr val="EC7000"/>
+                      <a:srgbClr val="FF6200"/>
                     </a:solidFill>
                     <a:lnL>
                       <a:noFill/>
@@ -26616,7 +24944,7 @@
                       <a:r>
                         <a:rPr sz="1300" b="1">
                           <a:solidFill>
-                            <a:srgbClr val="1F1F1F"/>
+                            <a:srgbClr val="FFFFFF"/>
                           </a:solidFill>
                           <a:latin typeface="Calibri"/>
                         </a:rPr>
@@ -26626,7 +24954,7 @@
                   </a:txBody>
                   <a:tcPr marL="91440" marR="91440" marT="41148" marB="41148" anchor="ctr">
                     <a:solidFill>
-                      <a:srgbClr val="EC7000"/>
+                      <a:srgbClr val="FF6200"/>
                     </a:solidFill>
                     <a:lnL>
                       <a:noFill/>
@@ -26665,7 +24993,7 @@
                       <a:r>
                         <a:rPr sz="1300" b="1">
                           <a:solidFill>
-                            <a:srgbClr val="1F1F1F"/>
+                            <a:srgbClr val="FFFFFF"/>
                           </a:solidFill>
                           <a:latin typeface="Calibri"/>
                         </a:rPr>
@@ -26675,7 +25003,7 @@
                   </a:txBody>
                   <a:tcPr marL="91440" marR="91440" marT="41148" marB="41148" anchor="ctr">
                     <a:solidFill>
-                      <a:srgbClr val="EC7000"/>
+                      <a:srgbClr val="FF6200"/>
                     </a:solidFill>
                     <a:lnL>
                       <a:noFill/>
@@ -26694,7 +25022,7 @@
                   </a:tcPr>
                 </a:tc>
               </a:tr>
-              <a:tr h="470916">
+              <a:tr h="283464">
                 <a:tc>
                   <a:txBody>
                     <a:bodyPr wrap="square">
@@ -26767,29 +25095,7 @@
                           </a:solidFill>
                           <a:latin typeface="Calibri"/>
                         </a:rPr>
-                        <a:t>Não localizado no corpus</a:t>
-                      </a:r>
-                    </a:p>
-                    <a:p>
-                      <a:pPr algn="ctr">
-                        <a:lnSpc>
-                          <a:spcPct val="100000"/>
-                        </a:lnSpc>
-                        <a:spcBef>
-                          <a:spcPts val="0"/>
-                        </a:spcBef>
-                        <a:spcAft>
-                          <a:spcPts val="0"/>
-                        </a:spcAft>
-                      </a:pPr>
-                      <a:r>
-                        <a:rPr sz="1300" b="0">
-                          <a:solidFill>
-                            <a:srgbClr val="1F1F1F"/>
-                          </a:solidFill>
-                          <a:latin typeface="Calibri"/>
-                        </a:rPr>
-                        <a:t>acessível</a:t>
+                        <a:t>-</a:t>
                       </a:r>
                     </a:p>
                   </a:txBody>
@@ -26836,29 +25142,7 @@
                           </a:solidFill>
                           <a:latin typeface="Calibri"/>
                         </a:rPr>
-                        <a:t>Não localizado no corpus</a:t>
-                      </a:r>
-                    </a:p>
-                    <a:p>
-                      <a:pPr algn="ctr">
-                        <a:lnSpc>
-                          <a:spcPct val="100000"/>
-                        </a:lnSpc>
-                        <a:spcBef>
-                          <a:spcPts val="0"/>
-                        </a:spcBef>
-                        <a:spcAft>
-                          <a:spcPts val="0"/>
-                        </a:spcAft>
-                      </a:pPr>
-                      <a:r>
-                        <a:rPr sz="1300" b="0">
-                          <a:solidFill>
-                            <a:srgbClr val="1F1F1F"/>
-                          </a:solidFill>
-                          <a:latin typeface="Calibri"/>
-                        </a:rPr>
-                        <a:t>acessível</a:t>
+                        <a:t>-</a:t>
                       </a:r>
                     </a:p>
                   </a:txBody>
@@ -26905,29 +25189,7 @@
                           </a:solidFill>
                           <a:latin typeface="Calibri"/>
                         </a:rPr>
-                        <a:t>Não localizado no corpus</a:t>
-                      </a:r>
-                    </a:p>
-                    <a:p>
-                      <a:pPr algn="ctr">
-                        <a:lnSpc>
-                          <a:spcPct val="100000"/>
-                        </a:lnSpc>
-                        <a:spcBef>
-                          <a:spcPts val="0"/>
-                        </a:spcBef>
-                        <a:spcAft>
-                          <a:spcPts val="0"/>
-                        </a:spcAft>
-                      </a:pPr>
-                      <a:r>
-                        <a:rPr sz="1300" b="0">
-                          <a:solidFill>
-                            <a:srgbClr val="1F1F1F"/>
-                          </a:solidFill>
-                          <a:latin typeface="Calibri"/>
-                        </a:rPr>
-                        <a:t>acessível</a:t>
+                        <a:t>-</a:t>
                       </a:r>
                     </a:p>
                   </a:txBody>
@@ -27023,29 +25285,7 @@
                           </a:solidFill>
                           <a:latin typeface="Calibri"/>
                         </a:rPr>
-                        <a:t>Não localizado no corpus</a:t>
-                      </a:r>
-                    </a:p>
-                    <a:p>
-                      <a:pPr algn="ctr">
-                        <a:lnSpc>
-                          <a:spcPct val="100000"/>
-                        </a:lnSpc>
-                        <a:spcBef>
-                          <a:spcPts val="0"/>
-                        </a:spcBef>
-                        <a:spcAft>
-                          <a:spcPts val="0"/>
-                        </a:spcAft>
-                      </a:pPr>
-                      <a:r>
-                        <a:rPr sz="1300" b="0">
-                          <a:solidFill>
-                            <a:srgbClr val="1F1F1F"/>
-                          </a:solidFill>
-                          <a:latin typeface="Calibri"/>
-                        </a:rPr>
-                        <a:t>acessível</a:t>
+                        <a:t>-</a:t>
                       </a:r>
                     </a:p>
                   </a:txBody>
@@ -27183,29 +25423,7 @@
                           </a:solidFill>
                           <a:latin typeface="Calibri"/>
                         </a:rPr>
-                        <a:t>Não localizado no corpus</a:t>
-                      </a:r>
-                    </a:p>
-                    <a:p>
-                      <a:pPr algn="ctr">
-                        <a:lnSpc>
-                          <a:spcPct val="100000"/>
-                        </a:lnSpc>
-                        <a:spcBef>
-                          <a:spcPts val="0"/>
-                        </a:spcBef>
-                        <a:spcAft>
-                          <a:spcPts val="0"/>
-                        </a:spcAft>
-                      </a:pPr>
-                      <a:r>
-                        <a:rPr sz="1300" b="0">
-                          <a:solidFill>
-                            <a:srgbClr val="1F1F1F"/>
-                          </a:solidFill>
-                          <a:latin typeface="Calibri"/>
-                        </a:rPr>
-                        <a:t>acessível</a:t>
+                        <a:t>-</a:t>
                       </a:r>
                     </a:p>
                   </a:txBody>
@@ -27301,29 +25519,7 @@
                           </a:solidFill>
                           <a:latin typeface="Calibri"/>
                         </a:rPr>
-                        <a:t>Não localizado no corpus</a:t>
-                      </a:r>
-                    </a:p>
-                    <a:p>
-                      <a:pPr algn="ctr">
-                        <a:lnSpc>
-                          <a:spcPct val="100000"/>
-                        </a:lnSpc>
-                        <a:spcBef>
-                          <a:spcPts val="0"/>
-                        </a:spcBef>
-                        <a:spcAft>
-                          <a:spcPts val="0"/>
-                        </a:spcAft>
-                      </a:pPr>
-                      <a:r>
-                        <a:rPr sz="1300" b="0">
-                          <a:solidFill>
-                            <a:srgbClr val="1F1F1F"/>
-                          </a:solidFill>
-                          <a:latin typeface="Calibri"/>
-                        </a:rPr>
-                        <a:t>acessível</a:t>
+                        <a:t>-</a:t>
                       </a:r>
                     </a:p>
                   </a:txBody>
@@ -27370,29 +25566,7 @@
                           </a:solidFill>
                           <a:latin typeface="Calibri"/>
                         </a:rPr>
-                        <a:t>Não localizado no corpus</a:t>
-                      </a:r>
-                    </a:p>
-                    <a:p>
-                      <a:pPr algn="ctr">
-                        <a:lnSpc>
-                          <a:spcPct val="100000"/>
-                        </a:lnSpc>
-                        <a:spcBef>
-                          <a:spcPts val="0"/>
-                        </a:spcBef>
-                        <a:spcAft>
-                          <a:spcPts val="0"/>
-                        </a:spcAft>
-                      </a:pPr>
-                      <a:r>
-                        <a:rPr sz="1300" b="0">
-                          <a:solidFill>
-                            <a:srgbClr val="1F1F1F"/>
-                          </a:solidFill>
-                          <a:latin typeface="Calibri"/>
-                        </a:rPr>
-                        <a:t>acessível</a:t>
+                        <a:t>-</a:t>
                       </a:r>
                     </a:p>
                   </a:txBody>
@@ -27648,29 +25822,7 @@
                           </a:solidFill>
                           <a:latin typeface="Calibri"/>
                         </a:rPr>
-                        <a:t>Não localizado no corpus</a:t>
-                      </a:r>
-                    </a:p>
-                    <a:p>
-                      <a:pPr algn="ctr">
-                        <a:lnSpc>
-                          <a:spcPct val="100000"/>
-                        </a:lnSpc>
-                        <a:spcBef>
-                          <a:spcPts val="0"/>
-                        </a:spcBef>
-                        <a:spcAft>
-                          <a:spcPts val="0"/>
-                        </a:spcAft>
-                      </a:pPr>
-                      <a:r>
-                        <a:rPr sz="1300" b="0">
-                          <a:solidFill>
-                            <a:srgbClr val="1F1F1F"/>
-                          </a:solidFill>
-                          <a:latin typeface="Calibri"/>
-                        </a:rPr>
-                        <a:t>acessível</a:t>
+                        <a:t>-</a:t>
                       </a:r>
                     </a:p>
                   </a:txBody>
@@ -27717,29 +25869,7 @@
                           </a:solidFill>
                           <a:latin typeface="Calibri"/>
                         </a:rPr>
-                        <a:t>Não localizado no corpus</a:t>
-                      </a:r>
-                    </a:p>
-                    <a:p>
-                      <a:pPr algn="ctr">
-                        <a:lnSpc>
-                          <a:spcPct val="100000"/>
-                        </a:lnSpc>
-                        <a:spcBef>
-                          <a:spcPts val="0"/>
-                        </a:spcBef>
-                        <a:spcAft>
-                          <a:spcPts val="0"/>
-                        </a:spcAft>
-                      </a:pPr>
-                      <a:r>
-                        <a:rPr sz="1300" b="0">
-                          <a:solidFill>
-                            <a:srgbClr val="1F1F1F"/>
-                          </a:solidFill>
-                          <a:latin typeface="Calibri"/>
-                        </a:rPr>
-                        <a:t>acessível</a:t>
+                        <a:t>-</a:t>
                       </a:r>
                     </a:p>
                   </a:txBody>
@@ -27762,7 +25892,7 @@
                   </a:tcPr>
                 </a:tc>
               </a:tr>
-              <a:tr h="470916">
+              <a:tr h="283464">
                 <a:tc>
                   <a:txBody>
                     <a:bodyPr wrap="square">
@@ -27835,29 +25965,7 @@
                           </a:solidFill>
                           <a:latin typeface="Calibri"/>
                         </a:rPr>
-                        <a:t>Não localizado no corpus</a:t>
-                      </a:r>
-                    </a:p>
-                    <a:p>
-                      <a:pPr algn="ctr">
-                        <a:lnSpc>
-                          <a:spcPct val="100000"/>
-                        </a:lnSpc>
-                        <a:spcBef>
-                          <a:spcPts val="0"/>
-                        </a:spcBef>
-                        <a:spcAft>
-                          <a:spcPts val="0"/>
-                        </a:spcAft>
-                      </a:pPr>
-                      <a:r>
-                        <a:rPr sz="1300" b="0">
-                          <a:solidFill>
-                            <a:srgbClr val="1F1F1F"/>
-                          </a:solidFill>
-                          <a:latin typeface="Calibri"/>
-                        </a:rPr>
-                        <a:t>acessível</a:t>
+                        <a:t>-</a:t>
                       </a:r>
                     </a:p>
                   </a:txBody>
@@ -27904,29 +26012,7 @@
                           </a:solidFill>
                           <a:latin typeface="Calibri"/>
                         </a:rPr>
-                        <a:t>Não localizado no corpus</a:t>
-                      </a:r>
-                    </a:p>
-                    <a:p>
-                      <a:pPr algn="ctr">
-                        <a:lnSpc>
-                          <a:spcPct val="100000"/>
-                        </a:lnSpc>
-                        <a:spcBef>
-                          <a:spcPts val="0"/>
-                        </a:spcBef>
-                        <a:spcAft>
-                          <a:spcPts val="0"/>
-                        </a:spcAft>
-                      </a:pPr>
-                      <a:r>
-                        <a:rPr sz="1300" b="0">
-                          <a:solidFill>
-                            <a:srgbClr val="1F1F1F"/>
-                          </a:solidFill>
-                          <a:latin typeface="Calibri"/>
-                        </a:rPr>
-                        <a:t>acessível</a:t>
+                        <a:t>-</a:t>
                       </a:r>
                     </a:p>
                   </a:txBody>
@@ -27973,29 +26059,7 @@
                           </a:solidFill>
                           <a:latin typeface="Calibri"/>
                         </a:rPr>
-                        <a:t>Não localizado no corpus</a:t>
-                      </a:r>
-                    </a:p>
-                    <a:p>
-                      <a:pPr algn="ctr">
-                        <a:lnSpc>
-                          <a:spcPct val="100000"/>
-                        </a:lnSpc>
-                        <a:spcBef>
-                          <a:spcPts val="0"/>
-                        </a:spcBef>
-                        <a:spcAft>
-                          <a:spcPts val="0"/>
-                        </a:spcAft>
-                      </a:pPr>
-                      <a:r>
-                        <a:rPr sz="1300" b="0">
-                          <a:solidFill>
-                            <a:srgbClr val="1F1F1F"/>
-                          </a:solidFill>
-                          <a:latin typeface="Calibri"/>
-                        </a:rPr>
-                        <a:t>acessível</a:t>
+                        <a:t>-</a:t>
                       </a:r>
                     </a:p>
                   </a:txBody>
@@ -28186,29 +26250,7 @@
                           </a:solidFill>
                           <a:latin typeface="Calibri"/>
                         </a:rPr>
-                        <a:t>Não localizado no corpus</a:t>
-                      </a:r>
-                    </a:p>
-                    <a:p>
-                      <a:pPr algn="ctr">
-                        <a:lnSpc>
-                          <a:spcPct val="100000"/>
-                        </a:lnSpc>
-                        <a:spcBef>
-                          <a:spcPts val="0"/>
-                        </a:spcBef>
-                        <a:spcAft>
-                          <a:spcPts val="0"/>
-                        </a:spcAft>
-                      </a:pPr>
-                      <a:r>
-                        <a:rPr sz="1300" b="0">
-                          <a:solidFill>
-                            <a:srgbClr val="1F1F1F"/>
-                          </a:solidFill>
-                          <a:latin typeface="Calibri"/>
-                        </a:rPr>
-                        <a:t>acessível</a:t>
+                        <a:t>-</a:t>
                       </a:r>
                     </a:p>
                   </a:txBody>
@@ -28257,29 +26299,7 @@
                           </a:solidFill>
                           <a:latin typeface="Calibri"/>
                         </a:rPr>
-                        <a:t>Não localizado no corpus</a:t>
-                      </a:r>
-                    </a:p>
-                    <a:p>
-                      <a:pPr algn="ctr">
-                        <a:lnSpc>
-                          <a:spcPct val="100000"/>
-                        </a:lnSpc>
-                        <a:spcBef>
-                          <a:spcPts val="0"/>
-                        </a:spcBef>
-                        <a:spcAft>
-                          <a:spcPts val="0"/>
-                        </a:spcAft>
-                      </a:pPr>
-                      <a:r>
-                        <a:rPr sz="1300" b="0">
-                          <a:solidFill>
-                            <a:srgbClr val="1F1F1F"/>
-                          </a:solidFill>
-                          <a:latin typeface="Calibri"/>
-                        </a:rPr>
-                        <a:t>acessível</a:t>
+                        <a:t>-</a:t>
                       </a:r>
                     </a:p>
                   </a:txBody>
@@ -28449,7 +26469,7 @@
         </p:nvGraphicFramePr>
         <p:xfrm>
           <a:off x="438912" y="932688"/>
-          <a:ext cx="11313868" cy="3026663"/>
+          <a:ext cx="11313868" cy="2089404"/>
         </p:xfrm>
         <a:graphic>
           <a:graphicData uri="http://schemas.openxmlformats.org/drawingml/2006/table">
@@ -28486,7 +26506,7 @@
                       <a:r>
                         <a:rPr sz="1300" b="1">
                           <a:solidFill>
-                            <a:srgbClr val="1F1F1F"/>
+                            <a:srgbClr val="FFFFFF"/>
                           </a:solidFill>
                           <a:latin typeface="Calibri"/>
                         </a:rPr>
@@ -28496,7 +26516,7 @@
                   </a:txBody>
                   <a:tcPr marL="91440" marR="91440" marT="41148" marB="41148" anchor="ctr">
                     <a:solidFill>
-                      <a:srgbClr val="EC7000"/>
+                      <a:srgbClr val="FF6200"/>
                     </a:solidFill>
                     <a:lnL>
                       <a:noFill/>
@@ -28535,7 +26555,7 @@
                       <a:r>
                         <a:rPr sz="1300" b="1">
                           <a:solidFill>
-                            <a:srgbClr val="1F1F1F"/>
+                            <a:srgbClr val="FFFFFF"/>
                           </a:solidFill>
                           <a:latin typeface="Calibri"/>
                         </a:rPr>
@@ -28545,7 +26565,7 @@
                   </a:txBody>
                   <a:tcPr marL="91440" marR="91440" marT="41148" marB="41148" anchor="ctr">
                     <a:solidFill>
-                      <a:srgbClr val="EC7000"/>
+                      <a:srgbClr val="FF6200"/>
                     </a:solidFill>
                     <a:lnL>
                       <a:noFill/>
@@ -28584,7 +26604,7 @@
                       <a:r>
                         <a:rPr sz="1300" b="1">
                           <a:solidFill>
-                            <a:srgbClr val="1F1F1F"/>
+                            <a:srgbClr val="FFFFFF"/>
                           </a:solidFill>
                           <a:latin typeface="Calibri"/>
                         </a:rPr>
@@ -28594,7 +26614,7 @@
                   </a:txBody>
                   <a:tcPr marL="91440" marR="91440" marT="41148" marB="41148" anchor="ctr">
                     <a:solidFill>
-                      <a:srgbClr val="EC7000"/>
+                      <a:srgbClr val="FF6200"/>
                     </a:solidFill>
                     <a:lnL>
                       <a:noFill/>
@@ -28633,7 +26653,7 @@
                       <a:r>
                         <a:rPr sz="1300" b="1">
                           <a:solidFill>
-                            <a:srgbClr val="1F1F1F"/>
+                            <a:srgbClr val="FFFFFF"/>
                           </a:solidFill>
                           <a:latin typeface="Calibri"/>
                         </a:rPr>
@@ -28643,7 +26663,7 @@
                   </a:txBody>
                   <a:tcPr marL="91440" marR="91440" marT="41148" marB="41148" anchor="ctr">
                     <a:solidFill>
-                      <a:srgbClr val="EC7000"/>
+                      <a:srgbClr val="FF6200"/>
                     </a:solidFill>
                     <a:lnL>
                       <a:noFill/>
@@ -28682,7 +26702,7 @@
                       <a:r>
                         <a:rPr sz="1300" b="1">
                           <a:solidFill>
-                            <a:srgbClr val="1F1F1F"/>
+                            <a:srgbClr val="FFFFFF"/>
                           </a:solidFill>
                           <a:latin typeface="Calibri"/>
                         </a:rPr>
@@ -28692,7 +26712,7 @@
                   </a:txBody>
                   <a:tcPr marL="91440" marR="91440" marT="41148" marB="41148" anchor="ctr">
                     <a:solidFill>
-                      <a:srgbClr val="EC7000"/>
+                      <a:srgbClr val="FF6200"/>
                     </a:solidFill>
                     <a:lnL>
                       <a:noFill/>
@@ -28853,29 +26873,7 @@
                           </a:solidFill>
                           <a:latin typeface="Calibri"/>
                         </a:rPr>
-                        <a:t>Não localizado no</a:t>
-                      </a:r>
-                    </a:p>
-                    <a:p>
-                      <a:pPr algn="ctr">
-                        <a:lnSpc>
-                          <a:spcPct val="100000"/>
-                        </a:lnSpc>
-                        <a:spcBef>
-                          <a:spcPts val="0"/>
-                        </a:spcBef>
-                        <a:spcAft>
-                          <a:spcPts val="0"/>
-                        </a:spcAft>
-                      </a:pPr>
-                      <a:r>
-                        <a:rPr sz="1300" b="0">
-                          <a:solidFill>
-                            <a:srgbClr val="1F1F1F"/>
-                          </a:solidFill>
-                          <a:latin typeface="Calibri"/>
-                        </a:rPr>
-                        <a:t>corpus acessível</a:t>
+                        <a:t>-</a:t>
                       </a:r>
                     </a:p>
                   </a:txBody>
@@ -29036,441 +27034,6 @@
                           <a:latin typeface="Calibri"/>
                         </a:rPr>
                         <a:t>júnior</a:t>
-                      </a:r>
-                    </a:p>
-                  </a:txBody>
-                  <a:tcPr marL="91440" marR="91440" marT="41148" marB="41148" anchor="ctr">
-                    <a:solidFill>
-                      <a:srgbClr val="FFFFFF"/>
-                    </a:solidFill>
-                    <a:lnL>
-                      <a:noFill/>
-                    </a:lnL>
-                    <a:lnR>
-                      <a:noFill/>
-                    </a:lnR>
-                    <a:lnT>
-                      <a:noFill/>
-                    </a:lnT>
-                    <a:lnB>
-                      <a:noFill/>
-                    </a:lnB>
-                  </a:tcPr>
-                </a:tc>
-              </a:tr>
-              <a:tr h="1033271">
-                <a:tc>
-                  <a:txBody>
-                    <a:bodyPr wrap="square">
-                      <a:noAutofit/>
-                    </a:bodyPr>
-                    <a:lstStyle/>
-                    <a:p>
-                      <a:pPr algn="l">
-                        <a:lnSpc>
-                          <a:spcPct val="100000"/>
-                        </a:lnSpc>
-                        <a:spcBef>
-                          <a:spcPts val="0"/>
-                        </a:spcBef>
-                        <a:spcAft>
-                          <a:spcPts val="0"/>
-                        </a:spcAft>
-                      </a:pPr>
-                      <a:r>
-                        <a:rPr sz="1300" b="1">
-                          <a:solidFill>
-                            <a:srgbClr val="1F1F1F"/>
-                          </a:solidFill>
-                          <a:latin typeface="Calibri"/>
-                        </a:rPr>
-                        <a:t>Remuneração</a:t>
-                      </a:r>
-                    </a:p>
-                  </a:txBody>
-                  <a:tcPr marL="91440" marR="91440" marT="41148" marB="41148" anchor="ctr">
-                    <a:solidFill>
-                      <a:srgbClr val="FFFFFF"/>
-                    </a:solidFill>
-                    <a:lnL>
-                      <a:noFill/>
-                    </a:lnL>
-                    <a:lnR>
-                      <a:noFill/>
-                    </a:lnR>
-                    <a:lnT>
-                      <a:noFill/>
-                    </a:lnT>
-                    <a:lnB>
-                      <a:noFill/>
-                    </a:lnB>
-                  </a:tcPr>
-                </a:tc>
-                <a:tc>
-                  <a:txBody>
-                    <a:bodyPr wrap="square">
-                      <a:noAutofit/>
-                    </a:bodyPr>
-                    <a:lstStyle/>
-                    <a:p>
-                      <a:pPr algn="ctr">
-                        <a:lnSpc>
-                          <a:spcPct val="100000"/>
-                        </a:lnSpc>
-                        <a:spcBef>
-                          <a:spcPts val="0"/>
-                        </a:spcBef>
-                        <a:spcAft>
-                          <a:spcPts val="0"/>
-                        </a:spcAft>
-                      </a:pPr>
-                      <a:r>
-                        <a:rPr sz="1300" b="0">
-                          <a:solidFill>
-                            <a:srgbClr val="1F1F1F"/>
-                          </a:solidFill>
-                          <a:latin typeface="Calibri"/>
-                        </a:rPr>
-                        <a:t>Sênior/mezanino</a:t>
-                      </a:r>
-                    </a:p>
-                    <a:p>
-                      <a:pPr algn="ctr">
-                        <a:lnSpc>
-                          <a:spcPct val="100000"/>
-                        </a:lnSpc>
-                        <a:spcBef>
-                          <a:spcPts val="0"/>
-                        </a:spcBef>
-                        <a:spcAft>
-                          <a:spcPts val="0"/>
-                        </a:spcAft>
-                      </a:pPr>
-                      <a:r>
-                        <a:rPr sz="1300" b="0">
-                          <a:solidFill>
-                            <a:srgbClr val="1F1F1F"/>
-                          </a:solidFill>
-                          <a:latin typeface="Calibri"/>
-                        </a:rPr>
-                        <a:t>conforme suplemento;</a:t>
-                      </a:r>
-                    </a:p>
-                    <a:p>
-                      <a:pPr algn="ctr">
-                        <a:lnSpc>
-                          <a:spcPct val="100000"/>
-                        </a:lnSpc>
-                        <a:spcBef>
-                          <a:spcPts val="0"/>
-                        </a:spcBef>
-                        <a:spcAft>
-                          <a:spcPts val="0"/>
-                        </a:spcAft>
-                      </a:pPr>
-                      <a:r>
-                        <a:rPr sz="1300" b="0">
-                          <a:solidFill>
-                            <a:srgbClr val="1F1F1F"/>
-                          </a:solidFill>
-                          <a:latin typeface="Calibri"/>
-                        </a:rPr>
-                        <a:t>spread final não</a:t>
-                      </a:r>
-                    </a:p>
-                    <a:p>
-                      <a:pPr algn="ctr">
-                        <a:lnSpc>
-                          <a:spcPct val="100000"/>
-                        </a:lnSpc>
-                        <a:spcBef>
-                          <a:spcPts val="0"/>
-                        </a:spcBef>
-                        <a:spcAft>
-                          <a:spcPts val="0"/>
-                        </a:spcAft>
-                      </a:pPr>
-                      <a:r>
-                        <a:rPr sz="1300" b="0">
-                          <a:solidFill>
-                            <a:srgbClr val="1F1F1F"/>
-                          </a:solidFill>
-                          <a:latin typeface="Calibri"/>
-                        </a:rPr>
-                        <a:t>localizado no</a:t>
-                      </a:r>
-                    </a:p>
-                    <a:p>
-                      <a:pPr algn="ctr">
-                        <a:lnSpc>
-                          <a:spcPct val="100000"/>
-                        </a:lnSpc>
-                        <a:spcBef>
-                          <a:spcPts val="0"/>
-                        </a:spcBef>
-                        <a:spcAft>
-                          <a:spcPts val="0"/>
-                        </a:spcAft>
-                      </a:pPr>
-                      <a:r>
-                        <a:rPr sz="1300" b="0">
-                          <a:solidFill>
-                            <a:srgbClr val="1F1F1F"/>
-                          </a:solidFill>
-                          <a:latin typeface="Calibri"/>
-                        </a:rPr>
-                        <a:t>regulamento</a:t>
-                      </a:r>
-                    </a:p>
-                  </a:txBody>
-                  <a:tcPr marL="91440" marR="91440" marT="41148" marB="41148" anchor="ctr">
-                    <a:solidFill>
-                      <a:srgbClr val="FFFFFF"/>
-                    </a:solidFill>
-                    <a:lnL>
-                      <a:noFill/>
-                    </a:lnL>
-                    <a:lnR>
-                      <a:noFill/>
-                    </a:lnR>
-                    <a:lnT>
-                      <a:noFill/>
-                    </a:lnT>
-                    <a:lnB>
-                      <a:noFill/>
-                    </a:lnB>
-                  </a:tcPr>
-                </a:tc>
-                <a:tc>
-                  <a:txBody>
-                    <a:bodyPr wrap="square">
-                      <a:noAutofit/>
-                    </a:bodyPr>
-                    <a:lstStyle/>
-                    <a:p>
-                      <a:pPr algn="ctr">
-                        <a:lnSpc>
-                          <a:spcPct val="100000"/>
-                        </a:lnSpc>
-                        <a:spcBef>
-                          <a:spcPts val="0"/>
-                        </a:spcBef>
-                        <a:spcAft>
-                          <a:spcPts val="0"/>
-                        </a:spcAft>
-                      </a:pPr>
-                      <a:r>
-                        <a:rPr sz="1300" b="0">
-                          <a:solidFill>
-                            <a:srgbClr val="1F1F1F"/>
-                          </a:solidFill>
-                          <a:latin typeface="Calibri"/>
-                        </a:rPr>
-                        <a:t>Não localizado no</a:t>
-                      </a:r>
-                    </a:p>
-                    <a:p>
-                      <a:pPr algn="ctr">
-                        <a:lnSpc>
-                          <a:spcPct val="100000"/>
-                        </a:lnSpc>
-                        <a:spcBef>
-                          <a:spcPts val="0"/>
-                        </a:spcBef>
-                        <a:spcAft>
-                          <a:spcPts val="0"/>
-                        </a:spcAft>
-                      </a:pPr>
-                      <a:r>
-                        <a:rPr sz="1300" b="0">
-                          <a:solidFill>
-                            <a:srgbClr val="1F1F1F"/>
-                          </a:solidFill>
-                          <a:latin typeface="Calibri"/>
-                        </a:rPr>
-                        <a:t>corpus acessível</a:t>
-                      </a:r>
-                    </a:p>
-                  </a:txBody>
-                  <a:tcPr marL="91440" marR="91440" marT="41148" marB="41148" anchor="ctr">
-                    <a:solidFill>
-                      <a:srgbClr val="FFFFFF"/>
-                    </a:solidFill>
-                    <a:lnL>
-                      <a:noFill/>
-                    </a:lnL>
-                    <a:lnR>
-                      <a:noFill/>
-                    </a:lnR>
-                    <a:lnT>
-                      <a:noFill/>
-                    </a:lnT>
-                    <a:lnB>
-                      <a:noFill/>
-                    </a:lnB>
-                  </a:tcPr>
-                </a:tc>
-                <a:tc>
-                  <a:txBody>
-                    <a:bodyPr wrap="square">
-                      <a:noAutofit/>
-                    </a:bodyPr>
-                    <a:lstStyle/>
-                    <a:p>
-                      <a:pPr algn="ctr">
-                        <a:lnSpc>
-                          <a:spcPct val="100000"/>
-                        </a:lnSpc>
-                        <a:spcBef>
-                          <a:spcPts val="0"/>
-                        </a:spcBef>
-                        <a:spcAft>
-                          <a:spcPts val="0"/>
-                        </a:spcAft>
-                      </a:pPr>
-                      <a:r>
-                        <a:rPr sz="1300" b="0">
-                          <a:solidFill>
-                            <a:srgbClr val="1F1F1F"/>
-                          </a:solidFill>
-                          <a:latin typeface="Calibri"/>
-                        </a:rPr>
-                        <a:t>Benchmark por</a:t>
-                      </a:r>
-                    </a:p>
-                    <a:p>
-                      <a:pPr algn="ctr">
-                        <a:lnSpc>
-                          <a:spcPct val="100000"/>
-                        </a:lnSpc>
-                        <a:spcBef>
-                          <a:spcPts val="0"/>
-                        </a:spcBef>
-                        <a:spcAft>
-                          <a:spcPts val="0"/>
-                        </a:spcAft>
-                      </a:pPr>
-                      <a:r>
-                        <a:rPr sz="1300" b="0">
-                          <a:solidFill>
-                            <a:srgbClr val="1F1F1F"/>
-                          </a:solidFill>
-                          <a:latin typeface="Calibri"/>
-                        </a:rPr>
-                        <a:t>suplemento; spread</a:t>
-                      </a:r>
-                    </a:p>
-                    <a:p>
-                      <a:pPr algn="ctr">
-                        <a:lnSpc>
-                          <a:spcPct val="100000"/>
-                        </a:lnSpc>
-                        <a:spcBef>
-                          <a:spcPts val="0"/>
-                        </a:spcBef>
-                        <a:spcAft>
-                          <a:spcPts val="0"/>
-                        </a:spcAft>
-                      </a:pPr>
-                      <a:r>
-                        <a:rPr sz="1300" b="0">
-                          <a:solidFill>
-                            <a:srgbClr val="1F1F1F"/>
-                          </a:solidFill>
-                          <a:latin typeface="Calibri"/>
-                        </a:rPr>
-                        <a:t>final não localizado</a:t>
-                      </a:r>
-                    </a:p>
-                    <a:p>
-                      <a:pPr algn="ctr">
-                        <a:lnSpc>
-                          <a:spcPct val="100000"/>
-                        </a:lnSpc>
-                        <a:spcBef>
-                          <a:spcPts val="0"/>
-                        </a:spcBef>
-                        <a:spcAft>
-                          <a:spcPts val="0"/>
-                        </a:spcAft>
-                      </a:pPr>
-                      <a:r>
-                        <a:rPr sz="1300" b="0">
-                          <a:solidFill>
-                            <a:srgbClr val="1F1F1F"/>
-                          </a:solidFill>
-                          <a:latin typeface="Calibri"/>
-                        </a:rPr>
-                        <a:t>neste regulamento</a:t>
-                      </a:r>
-                    </a:p>
-                  </a:txBody>
-                  <a:tcPr marL="91440" marR="91440" marT="41148" marB="41148" anchor="ctr">
-                    <a:solidFill>
-                      <a:srgbClr val="FFFFFF"/>
-                    </a:solidFill>
-                    <a:lnL>
-                      <a:noFill/>
-                    </a:lnL>
-                    <a:lnR>
-                      <a:noFill/>
-                    </a:lnR>
-                    <a:lnT>
-                      <a:noFill/>
-                    </a:lnT>
-                    <a:lnB>
-                      <a:noFill/>
-                    </a:lnB>
-                  </a:tcPr>
-                </a:tc>
-                <a:tc>
-                  <a:txBody>
-                    <a:bodyPr wrap="square">
-                      <a:noAutofit/>
-                    </a:bodyPr>
-                    <a:lstStyle/>
-                    <a:p>
-                      <a:pPr algn="ctr">
-                        <a:lnSpc>
-                          <a:spcPct val="100000"/>
-                        </a:lnSpc>
-                        <a:spcBef>
-                          <a:spcPts val="0"/>
-                        </a:spcBef>
-                        <a:spcAft>
-                          <a:spcPts val="0"/>
-                        </a:spcAft>
-                      </a:pPr>
-                      <a:r>
-                        <a:rPr sz="1300" b="0">
-                          <a:solidFill>
-                            <a:srgbClr val="1F1F1F"/>
-                          </a:solidFill>
-                          <a:latin typeface="Calibri"/>
-                        </a:rPr>
-                        <a:t>Não localizado no</a:t>
-                      </a:r>
-                    </a:p>
-                    <a:p>
-                      <a:pPr algn="ctr">
-                        <a:lnSpc>
-                          <a:spcPct val="100000"/>
-                        </a:lnSpc>
-                        <a:spcBef>
-                          <a:spcPts val="0"/>
-                        </a:spcBef>
-                        <a:spcAft>
-                          <a:spcPts val="0"/>
-                        </a:spcAft>
-                      </a:pPr>
-                      <a:r>
-                        <a:rPr sz="1300" b="0">
-                          <a:solidFill>
-                            <a:srgbClr val="1F1F1F"/>
-                          </a:solidFill>
-                          <a:latin typeface="Calibri"/>
-                        </a:rPr>
-                        <a:t>corpus acessível</a:t>
                       </a:r>
                     </a:p>
                   </a:txBody>
@@ -29519,6 +27082,265 @@
                           </a:solidFill>
                           <a:latin typeface="Calibri"/>
                         </a:rPr>
+                        <a:t>Remuneração</a:t>
+                      </a:r>
+                    </a:p>
+                  </a:txBody>
+                  <a:tcPr marL="91440" marR="91440" marT="41148" marB="41148" anchor="ctr">
+                    <a:solidFill>
+                      <a:srgbClr val="FFFFFF"/>
+                    </a:solidFill>
+                    <a:lnL>
+                      <a:noFill/>
+                    </a:lnL>
+                    <a:lnR>
+                      <a:noFill/>
+                    </a:lnR>
+                    <a:lnT>
+                      <a:noFill/>
+                    </a:lnT>
+                    <a:lnB>
+                      <a:noFill/>
+                    </a:lnB>
+                  </a:tcPr>
+                </a:tc>
+                <a:tc>
+                  <a:txBody>
+                    <a:bodyPr wrap="square">
+                      <a:noAutofit/>
+                    </a:bodyPr>
+                    <a:lstStyle/>
+                    <a:p>
+                      <a:pPr algn="ctr">
+                        <a:lnSpc>
+                          <a:spcPct val="100000"/>
+                        </a:lnSpc>
+                        <a:spcBef>
+                          <a:spcPts val="0"/>
+                        </a:spcBef>
+                        <a:spcAft>
+                          <a:spcPts val="0"/>
+                        </a:spcAft>
+                      </a:pPr>
+                      <a:r>
+                        <a:rPr sz="1300" b="0">
+                          <a:solidFill>
+                            <a:srgbClr val="1F1F1F"/>
+                          </a:solidFill>
+                          <a:latin typeface="Calibri"/>
+                        </a:rPr>
+                        <a:t>Sênior/mezanino</a:t>
+                      </a:r>
+                    </a:p>
+                    <a:p>
+                      <a:pPr algn="ctr">
+                        <a:lnSpc>
+                          <a:spcPct val="100000"/>
+                        </a:lnSpc>
+                        <a:spcBef>
+                          <a:spcPts val="0"/>
+                        </a:spcBef>
+                        <a:spcAft>
+                          <a:spcPts val="0"/>
+                        </a:spcAft>
+                      </a:pPr>
+                      <a:r>
+                        <a:rPr sz="1300" b="0">
+                          <a:solidFill>
+                            <a:srgbClr val="1F1F1F"/>
+                          </a:solidFill>
+                          <a:latin typeface="Calibri"/>
+                        </a:rPr>
+                        <a:t>conforme suplemento</a:t>
+                      </a:r>
+                    </a:p>
+                  </a:txBody>
+                  <a:tcPr marL="91440" marR="91440" marT="41148" marB="41148" anchor="ctr">
+                    <a:solidFill>
+                      <a:srgbClr val="FFFFFF"/>
+                    </a:solidFill>
+                    <a:lnL>
+                      <a:noFill/>
+                    </a:lnL>
+                    <a:lnR>
+                      <a:noFill/>
+                    </a:lnR>
+                    <a:lnT>
+                      <a:noFill/>
+                    </a:lnT>
+                    <a:lnB>
+                      <a:noFill/>
+                    </a:lnB>
+                  </a:tcPr>
+                </a:tc>
+                <a:tc>
+                  <a:txBody>
+                    <a:bodyPr wrap="square">
+                      <a:noAutofit/>
+                    </a:bodyPr>
+                    <a:lstStyle/>
+                    <a:p>
+                      <a:pPr algn="ctr">
+                        <a:lnSpc>
+                          <a:spcPct val="100000"/>
+                        </a:lnSpc>
+                        <a:spcBef>
+                          <a:spcPts val="0"/>
+                        </a:spcBef>
+                        <a:spcAft>
+                          <a:spcPts val="0"/>
+                        </a:spcAft>
+                      </a:pPr>
+                      <a:r>
+                        <a:rPr sz="1300" b="0">
+                          <a:solidFill>
+                            <a:srgbClr val="1F1F1F"/>
+                          </a:solidFill>
+                          <a:latin typeface="Calibri"/>
+                        </a:rPr>
+                        <a:t>-</a:t>
+                      </a:r>
+                    </a:p>
+                  </a:txBody>
+                  <a:tcPr marL="91440" marR="91440" marT="41148" marB="41148" anchor="ctr">
+                    <a:solidFill>
+                      <a:srgbClr val="FFFFFF"/>
+                    </a:solidFill>
+                    <a:lnL>
+                      <a:noFill/>
+                    </a:lnL>
+                    <a:lnR>
+                      <a:noFill/>
+                    </a:lnR>
+                    <a:lnT>
+                      <a:noFill/>
+                    </a:lnT>
+                    <a:lnB>
+                      <a:noFill/>
+                    </a:lnB>
+                  </a:tcPr>
+                </a:tc>
+                <a:tc>
+                  <a:txBody>
+                    <a:bodyPr wrap="square">
+                      <a:noAutofit/>
+                    </a:bodyPr>
+                    <a:lstStyle/>
+                    <a:p>
+                      <a:pPr algn="ctr">
+                        <a:lnSpc>
+                          <a:spcPct val="100000"/>
+                        </a:lnSpc>
+                        <a:spcBef>
+                          <a:spcPts val="0"/>
+                        </a:spcBef>
+                        <a:spcAft>
+                          <a:spcPts val="0"/>
+                        </a:spcAft>
+                      </a:pPr>
+                      <a:r>
+                        <a:rPr sz="1300" b="0">
+                          <a:solidFill>
+                            <a:srgbClr val="1F1F1F"/>
+                          </a:solidFill>
+                          <a:latin typeface="Calibri"/>
+                        </a:rPr>
+                        <a:t>-</a:t>
+                      </a:r>
+                    </a:p>
+                  </a:txBody>
+                  <a:tcPr marL="91440" marR="91440" marT="41148" marB="41148" anchor="ctr">
+                    <a:solidFill>
+                      <a:srgbClr val="FFFFFF"/>
+                    </a:solidFill>
+                    <a:lnL>
+                      <a:noFill/>
+                    </a:lnL>
+                    <a:lnR>
+                      <a:noFill/>
+                    </a:lnR>
+                    <a:lnT>
+                      <a:noFill/>
+                    </a:lnT>
+                    <a:lnB>
+                      <a:noFill/>
+                    </a:lnB>
+                  </a:tcPr>
+                </a:tc>
+                <a:tc>
+                  <a:txBody>
+                    <a:bodyPr wrap="square">
+                      <a:noAutofit/>
+                    </a:bodyPr>
+                    <a:lstStyle/>
+                    <a:p>
+                      <a:pPr algn="ctr">
+                        <a:lnSpc>
+                          <a:spcPct val="100000"/>
+                        </a:lnSpc>
+                        <a:spcBef>
+                          <a:spcPts val="0"/>
+                        </a:spcBef>
+                        <a:spcAft>
+                          <a:spcPts val="0"/>
+                        </a:spcAft>
+                      </a:pPr>
+                      <a:r>
+                        <a:rPr sz="1300" b="0">
+                          <a:solidFill>
+                            <a:srgbClr val="1F1F1F"/>
+                          </a:solidFill>
+                          <a:latin typeface="Calibri"/>
+                        </a:rPr>
+                        <a:t>-</a:t>
+                      </a:r>
+                    </a:p>
+                  </a:txBody>
+                  <a:tcPr marL="91440" marR="91440" marT="41148" marB="41148" anchor="ctr">
+                    <a:solidFill>
+                      <a:srgbClr val="FFFFFF"/>
+                    </a:solidFill>
+                    <a:lnL>
+                      <a:noFill/>
+                    </a:lnL>
+                    <a:lnR>
+                      <a:noFill/>
+                    </a:lnR>
+                    <a:lnT>
+                      <a:noFill/>
+                    </a:lnT>
+                    <a:lnB>
+                      <a:noFill/>
+                    </a:lnB>
+                  </a:tcPr>
+                </a:tc>
+              </a:tr>
+              <a:tr h="283464">
+                <a:tc>
+                  <a:txBody>
+                    <a:bodyPr wrap="square">
+                      <a:noAutofit/>
+                    </a:bodyPr>
+                    <a:lstStyle/>
+                    <a:p>
+                      <a:pPr algn="l">
+                        <a:lnSpc>
+                          <a:spcPct val="100000"/>
+                        </a:lnSpc>
+                        <a:spcBef>
+                          <a:spcPts val="0"/>
+                        </a:spcBef>
+                        <a:spcAft>
+                          <a:spcPts val="0"/>
+                        </a:spcAft>
+                      </a:pPr>
+                      <a:r>
+                        <a:rPr sz="1300" b="1">
+                          <a:solidFill>
+                            <a:srgbClr val="1F1F1F"/>
+                          </a:solidFill>
+                          <a:latin typeface="Calibri"/>
+                        </a:rPr>
                         <a:t>Volume/VNU</a:t>
                       </a:r>
                     </a:p>
@@ -29566,29 +27388,7 @@
                           </a:solidFill>
                           <a:latin typeface="Calibri"/>
                         </a:rPr>
-                        <a:t>Não localizado no</a:t>
-                      </a:r>
-                    </a:p>
-                    <a:p>
-                      <a:pPr algn="ctr">
-                        <a:lnSpc>
-                          <a:spcPct val="100000"/>
-                        </a:lnSpc>
-                        <a:spcBef>
-                          <a:spcPts val="0"/>
-                        </a:spcBef>
-                        <a:spcAft>
-                          <a:spcPts val="0"/>
-                        </a:spcAft>
-                      </a:pPr>
-                      <a:r>
-                        <a:rPr sz="1300" b="0">
-                          <a:solidFill>
-                            <a:srgbClr val="1F1F1F"/>
-                          </a:solidFill>
-                          <a:latin typeface="Calibri"/>
-                        </a:rPr>
-                        <a:t>corpus acessível</a:t>
+                        <a:t>-</a:t>
                       </a:r>
                     </a:p>
                   </a:txBody>
@@ -29635,29 +27435,7 @@
                           </a:solidFill>
                           <a:latin typeface="Calibri"/>
                         </a:rPr>
-                        <a:t>Não localizado no</a:t>
-                      </a:r>
-                    </a:p>
-                    <a:p>
-                      <a:pPr algn="ctr">
-                        <a:lnSpc>
-                          <a:spcPct val="100000"/>
-                        </a:lnSpc>
-                        <a:spcBef>
-                          <a:spcPts val="0"/>
-                        </a:spcBef>
-                        <a:spcAft>
-                          <a:spcPts val="0"/>
-                        </a:spcAft>
-                      </a:pPr>
-                      <a:r>
-                        <a:rPr sz="1300" b="0">
-                          <a:solidFill>
-                            <a:srgbClr val="1F1F1F"/>
-                          </a:solidFill>
-                          <a:latin typeface="Calibri"/>
-                        </a:rPr>
-                        <a:t>corpus acessível</a:t>
+                        <a:t>-</a:t>
                       </a:r>
                     </a:p>
                   </a:txBody>
@@ -29704,29 +27482,7 @@
                           </a:solidFill>
                           <a:latin typeface="Calibri"/>
                         </a:rPr>
-                        <a:t>Não localizado no</a:t>
-                      </a:r>
-                    </a:p>
-                    <a:p>
-                      <a:pPr algn="ctr">
-                        <a:lnSpc>
-                          <a:spcPct val="100000"/>
-                        </a:lnSpc>
-                        <a:spcBef>
-                          <a:spcPts val="0"/>
-                        </a:spcBef>
-                        <a:spcAft>
-                          <a:spcPts val="0"/>
-                        </a:spcAft>
-                      </a:pPr>
-                      <a:r>
-                        <a:rPr sz="1300" b="0">
-                          <a:solidFill>
-                            <a:srgbClr val="1F1F1F"/>
-                          </a:solidFill>
-                          <a:latin typeface="Calibri"/>
-                        </a:rPr>
-                        <a:t>corpus acessível</a:t>
+                        <a:t>-</a:t>
                       </a:r>
                     </a:p>
                   </a:txBody>
@@ -29773,29 +27529,7 @@
                           </a:solidFill>
                           <a:latin typeface="Calibri"/>
                         </a:rPr>
-                        <a:t>Não localizado no</a:t>
-                      </a:r>
-                    </a:p>
-                    <a:p>
-                      <a:pPr algn="ctr">
-                        <a:lnSpc>
-                          <a:spcPct val="100000"/>
-                        </a:lnSpc>
-                        <a:spcBef>
-                          <a:spcPts val="0"/>
-                        </a:spcBef>
-                        <a:spcAft>
-                          <a:spcPts val="0"/>
-                        </a:spcAft>
-                      </a:pPr>
-                      <a:r>
-                        <a:rPr sz="1300" b="0">
-                          <a:solidFill>
-                            <a:srgbClr val="1F1F1F"/>
-                          </a:solidFill>
-                          <a:latin typeface="Calibri"/>
-                        </a:rPr>
-                        <a:t>corpus acessível</a:t>
+                        <a:t>-</a:t>
                       </a:r>
                     </a:p>
                   </a:txBody>
@@ -29818,7 +27552,7 @@
                   </a:tcPr>
                 </a:tc>
               </a:tr>
-              <a:tr h="470916">
+              <a:tr h="283464">
                 <a:tc>
                   <a:txBody>
                     <a:bodyPr wrap="square">
@@ -29893,29 +27627,7 @@
                           </a:solidFill>
                           <a:latin typeface="Calibri"/>
                         </a:rPr>
-                        <a:t>Não localizado no</a:t>
-                      </a:r>
-                    </a:p>
-                    <a:p>
-                      <a:pPr algn="ctr">
-                        <a:lnSpc>
-                          <a:spcPct val="100000"/>
-                        </a:lnSpc>
-                        <a:spcBef>
-                          <a:spcPts val="0"/>
-                        </a:spcBef>
-                        <a:spcAft>
-                          <a:spcPts val="0"/>
-                        </a:spcAft>
-                      </a:pPr>
-                      <a:r>
-                        <a:rPr sz="1300" b="0">
-                          <a:solidFill>
-                            <a:srgbClr val="1F1F1F"/>
-                          </a:solidFill>
-                          <a:latin typeface="Calibri"/>
-                        </a:rPr>
-                        <a:t>corpus acessível</a:t>
+                        <a:t>-</a:t>
                       </a:r>
                     </a:p>
                   </a:txBody>
@@ -29964,29 +27676,7 @@
                           </a:solidFill>
                           <a:latin typeface="Calibri"/>
                         </a:rPr>
-                        <a:t>Não localizado no</a:t>
-                      </a:r>
-                    </a:p>
-                    <a:p>
-                      <a:pPr algn="ctr">
-                        <a:lnSpc>
-                          <a:spcPct val="100000"/>
-                        </a:lnSpc>
-                        <a:spcBef>
-                          <a:spcPts val="0"/>
-                        </a:spcBef>
-                        <a:spcAft>
-                          <a:spcPts val="0"/>
-                        </a:spcAft>
-                      </a:pPr>
-                      <a:r>
-                        <a:rPr sz="1300" b="0">
-                          <a:solidFill>
-                            <a:srgbClr val="1F1F1F"/>
-                          </a:solidFill>
-                          <a:latin typeface="Calibri"/>
-                        </a:rPr>
-                        <a:t>corpus acessível</a:t>
+                        <a:t>-</a:t>
                       </a:r>
                     </a:p>
                   </a:txBody>
@@ -30035,29 +27725,7 @@
                           </a:solidFill>
                           <a:latin typeface="Calibri"/>
                         </a:rPr>
-                        <a:t>Não localizado no</a:t>
-                      </a:r>
-                    </a:p>
-                    <a:p>
-                      <a:pPr algn="ctr">
-                        <a:lnSpc>
-                          <a:spcPct val="100000"/>
-                        </a:lnSpc>
-                        <a:spcBef>
-                          <a:spcPts val="0"/>
-                        </a:spcBef>
-                        <a:spcAft>
-                          <a:spcPts val="0"/>
-                        </a:spcAft>
-                      </a:pPr>
-                      <a:r>
-                        <a:rPr sz="1300" b="0">
-                          <a:solidFill>
-                            <a:srgbClr val="1F1F1F"/>
-                          </a:solidFill>
-                          <a:latin typeface="Calibri"/>
-                        </a:rPr>
-                        <a:t>corpus acessível</a:t>
+                        <a:t>-</a:t>
                       </a:r>
                     </a:p>
                   </a:txBody>
@@ -30106,29 +27774,7 @@
                           </a:solidFill>
                           <a:latin typeface="Calibri"/>
                         </a:rPr>
-                        <a:t>Não localizado no</a:t>
-                      </a:r>
-                    </a:p>
-                    <a:p>
-                      <a:pPr algn="ctr">
-                        <a:lnSpc>
-                          <a:spcPct val="100000"/>
-                        </a:lnSpc>
-                        <a:spcBef>
-                          <a:spcPts val="0"/>
-                        </a:spcBef>
-                        <a:spcAft>
-                          <a:spcPts val="0"/>
-                        </a:spcAft>
-                      </a:pPr>
-                      <a:r>
-                        <a:rPr sz="1300" b="0">
-                          <a:solidFill>
-                            <a:srgbClr val="1F1F1F"/>
-                          </a:solidFill>
-                          <a:latin typeface="Calibri"/>
-                        </a:rPr>
-                        <a:t>corpus acessível</a:t>
+                        <a:t>-</a:t>
                       </a:r>
                     </a:p>
                   </a:txBody>
@@ -30334,7 +27980,7 @@
                       <a:r>
                         <a:rPr sz="1300" b="1">
                           <a:solidFill>
-                            <a:srgbClr val="1F1F1F"/>
+                            <a:srgbClr val="FFFFFF"/>
                           </a:solidFill>
                           <a:latin typeface="Calibri"/>
                         </a:rPr>
@@ -30344,7 +27990,7 @@
                   </a:txBody>
                   <a:tcPr marL="91440" marR="91440" marT="41148" marB="41148" anchor="ctr">
                     <a:solidFill>
-                      <a:srgbClr val="EC7000"/>
+                      <a:srgbClr val="FF6200"/>
                     </a:solidFill>
                     <a:lnL>
                       <a:noFill/>
@@ -30383,7 +28029,7 @@
                       <a:r>
                         <a:rPr sz="1300" b="1">
                           <a:solidFill>
-                            <a:srgbClr val="1F1F1F"/>
+                            <a:srgbClr val="FFFFFF"/>
                           </a:solidFill>
                           <a:latin typeface="Calibri"/>
                         </a:rPr>
@@ -30393,7 +28039,7 @@
                   </a:txBody>
                   <a:tcPr marL="91440" marR="91440" marT="41148" marB="41148" anchor="ctr">
                     <a:solidFill>
-                      <a:srgbClr val="EC7000"/>
+                      <a:srgbClr val="FF6200"/>
                     </a:solidFill>
                     <a:lnL>
                       <a:noFill/>
@@ -30432,7 +28078,7 @@
                       <a:r>
                         <a:rPr sz="1300" b="1">
                           <a:solidFill>
-                            <a:srgbClr val="1F1F1F"/>
+                            <a:srgbClr val="FFFFFF"/>
                           </a:solidFill>
                           <a:latin typeface="Calibri"/>
                         </a:rPr>
@@ -30442,7 +28088,7 @@
                   </a:txBody>
                   <a:tcPr marL="91440" marR="91440" marT="41148" marB="41148" anchor="ctr">
                     <a:solidFill>
-                      <a:srgbClr val="EC7000"/>
+                      <a:srgbClr val="FF6200"/>
                     </a:solidFill>
                     <a:lnL>
                       <a:noFill/>
@@ -30481,7 +28127,7 @@
                       <a:r>
                         <a:rPr sz="1300" b="1">
                           <a:solidFill>
-                            <a:srgbClr val="1F1F1F"/>
+                            <a:srgbClr val="FFFFFF"/>
                           </a:solidFill>
                           <a:latin typeface="Calibri"/>
                         </a:rPr>
@@ -30491,7 +28137,7 @@
                   </a:txBody>
                   <a:tcPr marL="91440" marR="91440" marT="41148" marB="41148" anchor="ctr">
                     <a:solidFill>
-                      <a:srgbClr val="EC7000"/>
+                      <a:srgbClr val="FF6200"/>
                     </a:solidFill>
                     <a:lnL>
                       <a:noFill/>
@@ -30839,51 +28485,7 @@
                           </a:solidFill>
                           <a:latin typeface="Calibri"/>
                         </a:rPr>
-                        <a:t>Spread final não localizado no</a:t>
-                      </a:r>
-                    </a:p>
-                    <a:p>
-                      <a:pPr algn="ctr">
-                        <a:lnSpc>
-                          <a:spcPct val="100000"/>
-                        </a:lnSpc>
-                        <a:spcBef>
-                          <a:spcPts val="0"/>
-                        </a:spcBef>
-                        <a:spcAft>
-                          <a:spcPts val="0"/>
-                        </a:spcAft>
-                      </a:pPr>
-                      <a:r>
-                        <a:rPr sz="1300" b="0">
-                          <a:solidFill>
-                            <a:srgbClr val="1F1F1F"/>
-                          </a:solidFill>
-                          <a:latin typeface="Calibri"/>
-                        </a:rPr>
-                        <a:t>anúncio acessível; exige</a:t>
-                      </a:r>
-                    </a:p>
-                    <a:p>
-                      <a:pPr algn="ctr">
-                        <a:lnSpc>
-                          <a:spcPct val="100000"/>
-                        </a:lnSpc>
-                        <a:spcBef>
-                          <a:spcPts val="0"/>
-                        </a:spcBef>
-                        <a:spcAft>
-                          <a:spcPts val="0"/>
-                        </a:spcAft>
-                      </a:pPr>
-                      <a:r>
-                        <a:rPr sz="1300" b="0">
-                          <a:solidFill>
-                            <a:srgbClr val="1F1F1F"/>
-                          </a:solidFill>
-                          <a:latin typeface="Calibri"/>
-                        </a:rPr>
-                        <a:t>suplemento da série</a:t>
+                        <a:t>exige suplemento da série</a:t>
                       </a:r>
                     </a:p>
                   </a:txBody>
@@ -31021,51 +28623,7 @@
                           </a:solidFill>
                           <a:latin typeface="Calibri"/>
                         </a:rPr>
-                        <a:t>Spread final não localizado no</a:t>
-                      </a:r>
-                    </a:p>
-                    <a:p>
-                      <a:pPr algn="ctr">
-                        <a:lnSpc>
-                          <a:spcPct val="100000"/>
-                        </a:lnSpc>
-                        <a:spcBef>
-                          <a:spcPts val="0"/>
-                        </a:spcBef>
-                        <a:spcAft>
-                          <a:spcPts val="0"/>
-                        </a:spcAft>
-                      </a:pPr>
-                      <a:r>
-                        <a:rPr sz="1300" b="0">
-                          <a:solidFill>
-                            <a:srgbClr val="1F1F1F"/>
-                          </a:solidFill>
-                          <a:latin typeface="Calibri"/>
-                        </a:rPr>
-                        <a:t>anúncio; regulamento/suplementos</a:t>
-                      </a:r>
-                    </a:p>
-                    <a:p>
-                      <a:pPr algn="ctr">
-                        <a:lnSpc>
-                          <a:spcPct val="100000"/>
-                        </a:lnSpc>
-                        <a:spcBef>
-                          <a:spcPts val="0"/>
-                        </a:spcBef>
-                        <a:spcAft>
-                          <a:spcPts val="0"/>
-                        </a:spcAft>
-                      </a:pPr>
-                      <a:r>
-                        <a:rPr sz="1300" b="0">
-                          <a:solidFill>
-                            <a:srgbClr val="1F1F1F"/>
-                          </a:solidFill>
-                          <a:latin typeface="Calibri"/>
-                        </a:rPr>
-                        <a:t>inacessíveis</a:t>
+                        <a:t>-</a:t>
                       </a:r>
                     </a:p>
                   </a:txBody>
@@ -31797,7 +29355,7 @@
         </p:nvGraphicFramePr>
         <p:xfrm>
           <a:off x="438912" y="932688"/>
-          <a:ext cx="11313868" cy="2743198"/>
+          <a:ext cx="11313868" cy="2368294"/>
         </p:xfrm>
         <a:graphic>
           <a:graphicData uri="http://schemas.openxmlformats.org/drawingml/2006/table">
@@ -31834,7 +29392,7 @@
                       <a:r>
                         <a:rPr sz="1300" b="1">
                           <a:solidFill>
-                            <a:srgbClr val="1F1F1F"/>
+                            <a:srgbClr val="FFFFFF"/>
                           </a:solidFill>
                           <a:latin typeface="Calibri"/>
                         </a:rPr>
@@ -31844,7 +29402,7 @@
                   </a:txBody>
                   <a:tcPr marL="91440" marR="91440" marT="41148" marB="41148" anchor="ctr">
                     <a:solidFill>
-                      <a:srgbClr val="EC7000"/>
+                      <a:srgbClr val="FF6200"/>
                     </a:solidFill>
                     <a:lnL>
                       <a:noFill/>
@@ -31883,7 +29441,7 @@
                       <a:r>
                         <a:rPr sz="1300" b="1">
                           <a:solidFill>
-                            <a:srgbClr val="1F1F1F"/>
+                            <a:srgbClr val="FFFFFF"/>
                           </a:solidFill>
                           <a:latin typeface="Calibri"/>
                         </a:rPr>
@@ -31893,7 +29451,7 @@
                   </a:txBody>
                   <a:tcPr marL="91440" marR="91440" marT="41148" marB="41148" anchor="ctr">
                     <a:solidFill>
-                      <a:srgbClr val="EC7000"/>
+                      <a:srgbClr val="FF6200"/>
                     </a:solidFill>
                     <a:lnL>
                       <a:noFill/>
@@ -31932,7 +29490,7 @@
                       <a:r>
                         <a:rPr sz="1300" b="1">
                           <a:solidFill>
-                            <a:srgbClr val="1F1F1F"/>
+                            <a:srgbClr val="FFFFFF"/>
                           </a:solidFill>
                           <a:latin typeface="Calibri"/>
                         </a:rPr>
@@ -31942,7 +29500,7 @@
                   </a:txBody>
                   <a:tcPr marL="91440" marR="91440" marT="41148" marB="41148" anchor="ctr">
                     <a:solidFill>
-                      <a:srgbClr val="EC7000"/>
+                      <a:srgbClr val="FF6200"/>
                     </a:solidFill>
                     <a:lnL>
                       <a:noFill/>
@@ -31981,7 +29539,7 @@
                       <a:r>
                         <a:rPr sz="1300" b="1">
                           <a:solidFill>
-                            <a:srgbClr val="1F1F1F"/>
+                            <a:srgbClr val="FFFFFF"/>
                           </a:solidFill>
                           <a:latin typeface="Calibri"/>
                         </a:rPr>
@@ -31991,7 +29549,7 @@
                   </a:txBody>
                   <a:tcPr marL="91440" marR="91440" marT="41148" marB="41148" anchor="ctr">
                     <a:solidFill>
-                      <a:srgbClr val="EC7000"/>
+                      <a:srgbClr val="FF6200"/>
                     </a:solidFill>
                     <a:lnL>
                       <a:noFill/>
@@ -32030,7 +29588,7 @@
                       <a:r>
                         <a:rPr sz="1300" b="1">
                           <a:solidFill>
-                            <a:srgbClr val="1F1F1F"/>
+                            <a:srgbClr val="FFFFFF"/>
                           </a:solidFill>
                           <a:latin typeface="Calibri"/>
                         </a:rPr>
@@ -32040,7 +29598,7 @@
                   </a:txBody>
                   <a:tcPr marL="91440" marR="91440" marT="41148" marB="41148" anchor="ctr">
                     <a:solidFill>
-                      <a:srgbClr val="EC7000"/>
+                      <a:srgbClr val="FF6200"/>
                     </a:solidFill>
                     <a:lnL>
                       <a:noFill/>
@@ -32132,29 +29690,7 @@
                           </a:solidFill>
                           <a:latin typeface="Calibri"/>
                         </a:rPr>
-                        <a:t>Não localizado no</a:t>
-                      </a:r>
-                    </a:p>
-                    <a:p>
-                      <a:pPr algn="ctr">
-                        <a:lnSpc>
-                          <a:spcPct val="100000"/>
-                        </a:lnSpc>
-                        <a:spcBef>
-                          <a:spcPts val="0"/>
-                        </a:spcBef>
-                        <a:spcAft>
-                          <a:spcPts val="0"/>
-                        </a:spcAft>
-                      </a:pPr>
-                      <a:r>
-                        <a:rPr sz="1300" b="0">
-                          <a:solidFill>
-                            <a:srgbClr val="1F1F1F"/>
-                          </a:solidFill>
-                          <a:latin typeface="Calibri"/>
-                        </a:rPr>
-                        <a:t>corpus acessível</a:t>
+                        <a:t>-</a:t>
                       </a:r>
                     </a:p>
                   </a:txBody>
@@ -32201,29 +29737,7 @@
                           </a:solidFill>
                           <a:latin typeface="Calibri"/>
                         </a:rPr>
-                        <a:t>Não localizado no</a:t>
-                      </a:r>
-                    </a:p>
-                    <a:p>
-                      <a:pPr algn="ctr">
-                        <a:lnSpc>
-                          <a:spcPct val="100000"/>
-                        </a:lnSpc>
-                        <a:spcBef>
-                          <a:spcPts val="0"/>
-                        </a:spcBef>
-                        <a:spcAft>
-                          <a:spcPts val="0"/>
-                        </a:spcAft>
-                      </a:pPr>
-                      <a:r>
-                        <a:rPr sz="1300" b="0">
-                          <a:solidFill>
-                            <a:srgbClr val="1F1F1F"/>
-                          </a:solidFill>
-                          <a:latin typeface="Calibri"/>
-                        </a:rPr>
-                        <a:t>corpus acessível</a:t>
+                        <a:t>-</a:t>
                       </a:r>
                     </a:p>
                   </a:txBody>
@@ -32383,29 +29897,7 @@
                           </a:solidFill>
                           <a:latin typeface="Calibri"/>
                         </a:rPr>
-                        <a:t>Não localizado no</a:t>
-                      </a:r>
-                    </a:p>
-                    <a:p>
-                      <a:pPr algn="ctr">
-                        <a:lnSpc>
-                          <a:spcPct val="100000"/>
-                        </a:lnSpc>
-                        <a:spcBef>
-                          <a:spcPts val="0"/>
-                        </a:spcBef>
-                        <a:spcAft>
-                          <a:spcPts val="0"/>
-                        </a:spcAft>
-                      </a:pPr>
-                      <a:r>
-                        <a:rPr sz="1300" b="0">
-                          <a:solidFill>
-                            <a:srgbClr val="1F1F1F"/>
-                          </a:solidFill>
-                          <a:latin typeface="Calibri"/>
-                        </a:rPr>
-                        <a:t>corpus acessível</a:t>
+                        <a:t>-</a:t>
                       </a:r>
                     </a:p>
                   </a:txBody>
@@ -32545,29 +30037,7 @@
                           </a:solidFill>
                           <a:latin typeface="Calibri"/>
                         </a:rPr>
-                        <a:t>subclasses; datas</a:t>
-                      </a:r>
-                    </a:p>
-                    <a:p>
-                      <a:pPr algn="ctr">
-                        <a:lnSpc>
-                          <a:spcPct val="100000"/>
-                        </a:lnSpc>
-                        <a:spcBef>
-                          <a:spcPts val="0"/>
-                        </a:spcBef>
-                        <a:spcAft>
-                          <a:spcPts val="0"/>
-                        </a:spcAft>
-                      </a:pPr>
-                      <a:r>
-                        <a:rPr sz="1300" b="0">
-                          <a:solidFill>
-                            <a:srgbClr val="1F1F1F"/>
-                          </a:solidFill>
-                          <a:latin typeface="Calibri"/>
-                        </a:rPr>
-                        <a:t>remetidas a suplemento</a:t>
+                        <a:t>subclasses</a:t>
                       </a:r>
                     </a:p>
                   </a:txBody>
@@ -32614,29 +30084,7 @@
                           </a:solidFill>
                           <a:latin typeface="Calibri"/>
                         </a:rPr>
-                        <a:t>Não localizado no</a:t>
-                      </a:r>
-                    </a:p>
-                    <a:p>
-                      <a:pPr algn="ctr">
-                        <a:lnSpc>
-                          <a:spcPct val="100000"/>
-                        </a:lnSpc>
-                        <a:spcBef>
-                          <a:spcPts val="0"/>
-                        </a:spcBef>
-                        <a:spcAft>
-                          <a:spcPts val="0"/>
-                        </a:spcAft>
-                      </a:pPr>
-                      <a:r>
-                        <a:rPr sz="1300" b="0">
-                          <a:solidFill>
-                            <a:srgbClr val="1F1F1F"/>
-                          </a:solidFill>
-                          <a:latin typeface="Calibri"/>
-                        </a:rPr>
-                        <a:t>corpus acessível</a:t>
+                        <a:t>-</a:t>
                       </a:r>
                     </a:p>
                   </a:txBody>
@@ -32863,7 +30311,7 @@
                   </a:tcPr>
                 </a:tc>
               </a:tr>
-              <a:tr h="658368">
+              <a:tr h="283464">
                 <a:tc>
                   <a:txBody>
                     <a:bodyPr wrap="square">
@@ -32938,51 +30386,7 @@
                           </a:solidFill>
                           <a:latin typeface="Calibri"/>
                         </a:rPr>
-                        <a:t>Classe indeterminada;</a:t>
-                      </a:r>
-                    </a:p>
-                    <a:p>
-                      <a:pPr algn="ctr">
-                        <a:lnSpc>
-                          <a:spcPct val="100000"/>
-                        </a:lnSpc>
-                        <a:spcBef>
-                          <a:spcPts val="0"/>
-                        </a:spcBef>
-                        <a:spcAft>
-                          <a:spcPts val="0"/>
-                        </a:spcAft>
-                      </a:pPr>
-                      <a:r>
-                        <a:rPr sz="1300" b="0">
-                          <a:solidFill>
-                            <a:srgbClr val="1F1F1F"/>
-                          </a:solidFill>
-                          <a:latin typeface="Calibri"/>
-                        </a:rPr>
-                        <a:t>vencimento das séries</a:t>
-                      </a:r>
-                    </a:p>
-                    <a:p>
-                      <a:pPr algn="ctr">
-                        <a:lnSpc>
-                          <a:spcPct val="100000"/>
-                        </a:lnSpc>
-                        <a:spcBef>
-                          <a:spcPts val="0"/>
-                        </a:spcBef>
-                        <a:spcAft>
-                          <a:spcPts val="0"/>
-                        </a:spcAft>
-                      </a:pPr>
-                      <a:r>
-                        <a:rPr sz="1300" b="0">
-                          <a:solidFill>
-                            <a:srgbClr val="1F1F1F"/>
-                          </a:solidFill>
-                          <a:latin typeface="Calibri"/>
-                        </a:rPr>
-                        <a:t>conforme suplemento</a:t>
+                        <a:t>Classe indeterminada</a:t>
                       </a:r>
                     </a:p>
                   </a:txBody>
@@ -33031,29 +30435,7 @@
                           </a:solidFill>
                           <a:latin typeface="Calibri"/>
                         </a:rPr>
-                        <a:t>Não localizado no</a:t>
-                      </a:r>
-                    </a:p>
-                    <a:p>
-                      <a:pPr algn="ctr">
-                        <a:lnSpc>
-                          <a:spcPct val="100000"/>
-                        </a:lnSpc>
-                        <a:spcBef>
-                          <a:spcPts val="0"/>
-                        </a:spcBef>
-                        <a:spcAft>
-                          <a:spcPts val="0"/>
-                        </a:spcAft>
-                      </a:pPr>
-                      <a:r>
-                        <a:rPr sz="1300" b="0">
-                          <a:solidFill>
-                            <a:srgbClr val="1F1F1F"/>
-                          </a:solidFill>
-                          <a:latin typeface="Calibri"/>
-                        </a:rPr>
-                        <a:t>corpus acessível</a:t>
+                        <a:t>-</a:t>
                       </a:r>
                     </a:p>
                   </a:txBody>
@@ -33102,29 +30484,7 @@
                           </a:solidFill>
                           <a:latin typeface="Calibri"/>
                         </a:rPr>
-                        <a:t>Não localizado no</a:t>
-                      </a:r>
-                    </a:p>
-                    <a:p>
-                      <a:pPr algn="ctr">
-                        <a:lnSpc>
-                          <a:spcPct val="100000"/>
-                        </a:lnSpc>
-                        <a:spcBef>
-                          <a:spcPts val="0"/>
-                        </a:spcBef>
-                        <a:spcAft>
-                          <a:spcPts val="0"/>
-                        </a:spcAft>
-                      </a:pPr>
-                      <a:r>
-                        <a:rPr sz="1300" b="0">
-                          <a:solidFill>
-                            <a:srgbClr val="1F1F1F"/>
-                          </a:solidFill>
-                          <a:latin typeface="Calibri"/>
-                        </a:rPr>
-                        <a:t>corpus acessível</a:t>
+                        <a:t>-</a:t>
                       </a:r>
                     </a:p>
                   </a:txBody>
@@ -33173,29 +30533,7 @@
                           </a:solidFill>
                           <a:latin typeface="Calibri"/>
                         </a:rPr>
-                        <a:t>Não localizado no</a:t>
-                      </a:r>
-                    </a:p>
-                    <a:p>
-                      <a:pPr algn="ctr">
-                        <a:lnSpc>
-                          <a:spcPct val="100000"/>
-                        </a:lnSpc>
-                        <a:spcBef>
-                          <a:spcPts val="0"/>
-                        </a:spcBef>
-                        <a:spcAft>
-                          <a:spcPts val="0"/>
-                        </a:spcAft>
-                      </a:pPr>
-                      <a:r>
-                        <a:rPr sz="1300" b="0">
-                          <a:solidFill>
-                            <a:srgbClr val="1F1F1F"/>
-                          </a:solidFill>
-                          <a:latin typeface="Calibri"/>
-                        </a:rPr>
-                        <a:t>corpus acessível</a:t>
+                        <a:t>-</a:t>
                       </a:r>
                     </a:p>
                   </a:txBody>
